--- a/Documento 0/Presentacion INGDESOFTWARE.pptx
+++ b/Documento 0/Presentacion INGDESOFTWARE.pptx
@@ -28,22 +28,21 @@
     <p:sldId id="272" r:id="rId23"/>
     <p:sldId id="273" r:id="rId24"/>
     <p:sldId id="274" r:id="rId25"/>
-    <p:sldId id="275" r:id="rId26"/>
   </p:sldIdLst>
   <p:sldSz cy="6858000" cx="12192000"/>
   <p:notesSz cx="6858000" cy="9144000"/>
   <p:embeddedFontLst>
     <p:embeddedFont>
       <p:font typeface="Play"/>
-      <p:regular r:id="rId27"/>
-      <p:bold r:id="rId28"/>
+      <p:regular r:id="rId26"/>
+      <p:bold r:id="rId27"/>
     </p:embeddedFont>
     <p:embeddedFont>
       <p:font typeface="Roboto"/>
-      <p:regular r:id="rId29"/>
-      <p:bold r:id="rId30"/>
-      <p:italic r:id="rId31"/>
-      <p:boldItalic r:id="rId32"/>
+      <p:regular r:id="rId28"/>
+      <p:bold r:id="rId29"/>
+      <p:italic r:id="rId30"/>
+      <p:boldItalic r:id="rId31"/>
     </p:embeddedFont>
   </p:embeddedFontLst>
   <p:defaultTextStyle>
@@ -277,7 +276,7 @@
   </p:defaultTextStyle>
   <p:extLst>
     <p:ext uri="GoogleSlidesCustomDataVersion2">
-      <go:slidesCustomData xmlns:go="http://customooxmlschemas.google.com/" r:id="rId33" roundtripDataSignature="AMtx7mhbmhotB3wRlnMlTF/HKLzf4K2hoA=="/>
+      <go:slidesCustomData xmlns:go="http://customooxmlschemas.google.com/" r:id="rId32" roundtripDataSignature="AMtx7mjJ4WAD0QgGEIXtrGt+z9GtawHiKw=="/>
     </p:ext>
   </p:extLst>
 </p:presentation>
@@ -1916,7 +1915,7 @@
       </p:grpSpPr>
       <p:sp>
         <p:nvSpPr>
-          <p:cNvPr id="266" name="Google Shape;266;p16:notes"/>
+          <p:cNvPr id="266" name="Google Shape;266;p17:notes"/>
           <p:cNvSpPr txBox="1"/>
           <p:nvPr>
             <p:ph idx="1" type="body"/>
@@ -1963,7 +1962,7 @@
       </p:sp>
       <p:sp>
         <p:nvSpPr>
-          <p:cNvPr id="267" name="Google Shape;267;p16:notes"/>
+          <p:cNvPr id="267" name="Google Shape;267;p17:notes"/>
           <p:cNvSpPr/>
           <p:nvPr>
             <p:ph idx="2" type="sldImg"/>
@@ -2033,7 +2032,7 @@
       </p:grpSpPr>
       <p:sp>
         <p:nvSpPr>
-          <p:cNvPr id="277" name="Google Shape;277;p17:notes"/>
+          <p:cNvPr id="277" name="Google Shape;277;g3515db5e1ac_7_5:notes"/>
           <p:cNvSpPr txBox="1"/>
           <p:nvPr>
             <p:ph idx="1" type="body"/>
@@ -2080,7 +2079,7 @@
       </p:sp>
       <p:sp>
         <p:nvSpPr>
-          <p:cNvPr id="278" name="Google Shape;278;p17:notes"/>
+          <p:cNvPr id="278" name="Google Shape;278;g3515db5e1ac_7_5:notes"/>
           <p:cNvSpPr/>
           <p:nvPr>
             <p:ph idx="2" type="sldImg"/>
@@ -2089,7 +2088,7 @@
         <p:spPr>
           <a:xfrm>
             <a:off x="1143225" y="685800"/>
-            <a:ext cx="4572225" cy="3429000"/>
+            <a:ext cx="4572300" cy="3429000"/>
           </a:xfrm>
           <a:custGeom>
             <a:rect b="b" l="l" r="r" t="t"/>
@@ -2207,123 +2206,6 @@
           <a:xfrm>
             <a:off x="1143225" y="685800"/>
             <a:ext cx="4572225" cy="3429000"/>
-          </a:xfrm>
-          <a:custGeom>
-            <a:rect b="b" l="l" r="r" t="t"/>
-            <a:pathLst>
-              <a:path extrusionOk="0" h="120000" w="120000">
-                <a:moveTo>
-                  <a:pt x="0" y="0"/>
-                </a:moveTo>
-                <a:lnTo>
-                  <a:pt x="120000" y="0"/>
-                </a:lnTo>
-                <a:lnTo>
-                  <a:pt x="120000" y="120000"/>
-                </a:lnTo>
-                <a:lnTo>
-                  <a:pt x="0" y="120000"/>
-                </a:lnTo>
-                <a:close/>
-              </a:path>
-            </a:pathLst>
-          </a:custGeom>
-          <a:noFill/>
-          <a:ln cap="flat" cmpd="sng" w="9525">
-            <a:solidFill>
-              <a:srgbClr val="000000"/>
-            </a:solidFill>
-            <a:prstDash val="solid"/>
-            <a:round/>
-            <a:headEnd len="sm" w="sm" type="none"/>
-            <a:tailEnd len="sm" w="sm" type="none"/>
-          </a:ln>
-        </p:spPr>
-      </p:sp>
-    </p:spTree>
-  </p:cSld>
-  <p:clrMapOvr>
-    <a:masterClrMapping/>
-  </p:clrMapOvr>
-</p:notes>
-</file>
-
-<file path=ppt/notesSlides/notesSlide20.xml><?xml version="1.0" encoding="utf-8"?>
-<p:notes xmlns:a="http://schemas.openxmlformats.org/drawingml/2006/main" xmlns:r="http://schemas.openxmlformats.org/officeDocument/2006/relationships" xmlns:mc="http://schemas.openxmlformats.org/markup-compatibility/2006" xmlns:mv="urn:schemas-microsoft-com:mac:vml" xmlns:p="http://schemas.openxmlformats.org/presentationml/2006/main" xmlns:c="http://schemas.openxmlformats.org/drawingml/2006/chart" xmlns:dgm="http://schemas.openxmlformats.org/drawingml/2006/diagram" xmlns:o="urn:schemas-microsoft-com:office:office" xmlns:v="urn:schemas-microsoft-com:vml" xmlns:pvml="urn:schemas-microsoft-com:office:powerpoint" xmlns:com="http://schemas.openxmlformats.org/drawingml/2006/compatibility" xmlns:p14="http://schemas.microsoft.com/office/powerpoint/2010/main" xmlns:p15="http://schemas.microsoft.com/office/powerpoint/2012/main" xmlns:ahyp="http://schemas.microsoft.com/office/drawing/2018/hyperlinkcolor" showMasterPhAnim="0" showMasterSp="0">
-  <p:cSld>
-    <p:spTree>
-      <p:nvGrpSpPr>
-        <p:cNvPr id="287" name="Shape 287"/>
-        <p:cNvGrpSpPr/>
-        <p:nvPr/>
-      </p:nvGrpSpPr>
-      <p:grpSpPr>
-        <a:xfrm>
-          <a:off x="0" y="0"/>
-          <a:ext cx="0" cy="0"/>
-          <a:chOff x="0" y="0"/>
-          <a:chExt cx="0" cy="0"/>
-        </a:xfrm>
-      </p:grpSpPr>
-      <p:sp>
-        <p:nvSpPr>
-          <p:cNvPr id="288" name="Google Shape;288;g3515db5e1ac_7_5:notes"/>
-          <p:cNvSpPr txBox="1"/>
-          <p:nvPr>
-            <p:ph idx="1" type="body"/>
-          </p:nvPr>
-        </p:nvSpPr>
-        <p:spPr>
-          <a:xfrm>
-            <a:off x="685800" y="4343400"/>
-            <a:ext cx="5486400" cy="4114800"/>
-          </a:xfrm>
-          <a:prstGeom prst="rect">
-            <a:avLst/>
-          </a:prstGeom>
-          <a:noFill/>
-          <a:ln>
-            <a:noFill/>
-          </a:ln>
-        </p:spPr>
-        <p:txBody>
-          <a:bodyPr anchorCtr="0" anchor="t" bIns="91425" lIns="91425" spcFirstLastPara="1" rIns="91425" wrap="square" tIns="91425">
-            <a:noAutofit/>
-          </a:bodyPr>
-          <a:lstStyle/>
-          <a:p>
-            <a:pPr indent="0" lvl="0" marL="0" rtl="0" algn="l">
-              <a:lnSpc>
-                <a:spcPct val="100000"/>
-              </a:lnSpc>
-              <a:spcBef>
-                <a:spcPts val="0"/>
-              </a:spcBef>
-              <a:spcAft>
-                <a:spcPts val="0"/>
-              </a:spcAft>
-              <a:buSzPts val="1100"/>
-              <a:buNone/>
-            </a:pPr>
-            <a:r>
-              <a:t/>
-            </a:r>
-            <a:endParaRPr/>
-          </a:p>
-        </p:txBody>
-      </p:sp>
-      <p:sp>
-        <p:nvSpPr>
-          <p:cNvPr id="289" name="Google Shape;289;g3515db5e1ac_7_5:notes"/>
-          <p:cNvSpPr/>
-          <p:nvPr>
-            <p:ph idx="2" type="sldImg"/>
-          </p:nvPr>
-        </p:nvSpPr>
-        <p:spPr>
-          <a:xfrm>
-            <a:off x="1143225" y="685800"/>
-            <a:ext cx="4572300" cy="3429000"/>
           </a:xfrm>
           <a:custGeom>
             <a:rect b="b" l="l" r="r" t="t"/>
@@ -20780,7 +20662,7 @@
             <a:gsLst>
               <a:gs pos="0">
                 <a:srgbClr val="156082">
-                  <a:alpha val="49019"/>
+                  <a:alpha val="48627"/>
                 </a:srgbClr>
               </a:gs>
               <a:gs pos="100000">
@@ -20851,7 +20733,7 @@
             <a:gsLst>
               <a:gs pos="0">
                 <a:srgbClr val="000000">
-                  <a:alpha val="58039"/>
+                  <a:alpha val="57647"/>
                 </a:srgbClr>
               </a:gs>
               <a:gs pos="69000">
@@ -20979,7 +20861,7 @@
               </a:gs>
               <a:gs pos="100000">
                 <a:srgbClr val="0F4861">
-                  <a:alpha val="25098"/>
+                  <a:alpha val="24705"/>
                 </a:srgbClr>
               </a:gs>
             </a:gsLst>
@@ -21333,7 +21215,7 @@
             </a:pPr>
             <a:r>
               <a:rPr b="1" lang="es-MX" sz="2150"/>
-              <a:t>Aquí se muestran 5 de un total de 54 requerimientos funcionales</a:t>
+              <a:t>Aquí se muestran 5 de un total de 51 requerimientos funcionales</a:t>
             </a:r>
             <a:endParaRPr b="1" sz="2150"/>
           </a:p>
@@ -21553,14 +21435,27 @@
             </a:pPr>
             <a:r>
               <a:rPr b="1" lang="es-MX" sz="2150"/>
-              <a:t>RF5. Visualización de documento:</a:t>
+              <a:t>RF5. Descarga documento:</a:t>
             </a:r>
-            <a:br>
-              <a:rPr b="1" lang="es-MX" sz="2150"/>
-            </a:br>
+            <a:endParaRPr b="1" sz="2150"/>
+          </a:p>
+          <a:p>
+            <a:pPr indent="-324167" lvl="0" marL="457200" rtl="0" algn="l">
+              <a:lnSpc>
+                <a:spcPct val="115000"/>
+              </a:lnSpc>
+              <a:spcBef>
+                <a:spcPts val="0"/>
+              </a:spcBef>
+              <a:spcAft>
+                <a:spcPts val="0"/>
+              </a:spcAft>
+              <a:buSzPct val="100000"/>
+              <a:buChar char="•"/>
+            </a:pPr>
             <a:r>
               <a:rPr lang="es-MX" sz="2150"/>
-              <a:t>Los usuarios que envían documentos deben poder visualizar los documentos directamente desde el sistema antes de enviar.</a:t>
+              <a:t>Los usuarios que envían documentos deben poder descargar los documentos directamente desde el sistema antes de enviar. Esta funcionalidad aplica a los formatos definidos en el RF2.</a:t>
             </a:r>
             <a:endParaRPr sz="2150"/>
           </a:p>
@@ -21685,7 +21580,7 @@
             </a:pPr>
             <a:r>
               <a:rPr b="1" lang="es-MX" sz="1500"/>
-              <a:t>Aquí se muestran 5 de 27 requisitos funcionales que tenemos</a:t>
+              <a:t>Aquí se muestran 5 de 28 requisitos funcionales que tenemos</a:t>
             </a:r>
             <a:endParaRPr b="1" sz="1500"/>
           </a:p>
@@ -22010,7 +21905,7 @@
             <a:tbl>
               <a:tblPr>
                 <a:noFill/>
-                <a:tableStyleId>{053BC67D-7B8C-4163-B9A9-5A99E02DB004}</a:tableStyleId>
+                <a:tableStyleId>{0A2B30D6-35F1-4D76-8223-03FBE708230A}</a:tableStyleId>
               </a:tblPr>
               <a:tblGrid>
                 <a:gridCol w="737225"/>
@@ -26541,7 +26436,7 @@
             <a:tbl>
               <a:tblPr bandRow="1">
                 <a:noFill/>
-                <a:tableStyleId>{053BC67D-7B8C-4163-B9A9-5A99E02DB004}</a:tableStyleId>
+                <a:tableStyleId>{0A2B30D6-35F1-4D76-8223-03FBE708230A}</a:tableStyleId>
               </a:tblPr>
               <a:tblGrid>
                 <a:gridCol w="3684850"/>
@@ -26553,7 +26448,7 @@
                     <a:bodyPr/>
                     <a:lstStyle/>
                     <a:p>
-                      <a:pPr indent="0" lvl="0" marL="0" marR="0" rtl="0" algn="l">
+                      <a:pPr indent="0" lvl="0" marL="0" rtl="0" algn="just">
                         <a:lnSpc>
                           <a:spcPct val="150000"/>
                         </a:lnSpc>
@@ -26563,15 +26458,10 @@
                         <a:spcAft>
                           <a:spcPts val="0"/>
                         </a:spcAft>
-                        <a:buClr>
-                          <a:srgbClr val="000000"/>
-                        </a:buClr>
-                        <a:buSzPts val="1200"/>
-                        <a:buFont typeface="Arial"/>
                         <a:buNone/>
                       </a:pPr>
                       <a:r>
-                        <a:rPr lang="es-MX" sz="1200" u="none" cap="none" strike="noStrike">
+                        <a:rPr lang="es-MX" sz="1200">
                           <a:latin typeface="Times New Roman"/>
                           <a:ea typeface="Times New Roman"/>
                           <a:cs typeface="Times New Roman"/>
@@ -26579,7 +26469,7 @@
                         </a:rPr>
                         <a:t>Nombre del Caso de Uso</a:t>
                       </a:r>
-                      <a:endParaRPr sz="1200" u="none" cap="none" strike="noStrike">
+                      <a:endParaRPr sz="1200">
                         <a:latin typeface="Times New Roman"/>
                         <a:ea typeface="Times New Roman"/>
                         <a:cs typeface="Times New Roman"/>
@@ -26588,6 +26478,42 @@
                     </a:p>
                   </a:txBody>
                   <a:tcPr marT="0" marB="0" marR="68575" marL="68575">
+                    <a:lnL cap="flat" cmpd="sng" w="6350">
+                      <a:solidFill>
+                        <a:srgbClr val="000000"/>
+                      </a:solidFill>
+                      <a:prstDash val="solid"/>
+                      <a:round/>
+                      <a:headEnd len="sm" w="sm" type="none"/>
+                      <a:tailEnd len="sm" w="sm" type="none"/>
+                    </a:lnL>
+                    <a:lnR cap="flat" cmpd="sng" w="6350">
+                      <a:solidFill>
+                        <a:srgbClr val="000000"/>
+                      </a:solidFill>
+                      <a:prstDash val="solid"/>
+                      <a:round/>
+                      <a:headEnd len="sm" w="sm" type="none"/>
+                      <a:tailEnd len="sm" w="sm" type="none"/>
+                    </a:lnR>
+                    <a:lnT cap="flat" cmpd="sng" w="6350">
+                      <a:solidFill>
+                        <a:srgbClr val="000000"/>
+                      </a:solidFill>
+                      <a:prstDash val="solid"/>
+                      <a:round/>
+                      <a:headEnd len="sm" w="sm" type="none"/>
+                      <a:tailEnd len="sm" w="sm" type="none"/>
+                    </a:lnT>
+                    <a:lnB cap="flat" cmpd="sng" w="6350">
+                      <a:solidFill>
+                        <a:srgbClr val="000000"/>
+                      </a:solidFill>
+                      <a:prstDash val="solid"/>
+                      <a:round/>
+                      <a:headEnd len="sm" w="sm" type="none"/>
+                      <a:tailEnd len="sm" w="sm" type="none"/>
+                    </a:lnB>
                     <a:solidFill>
                       <a:srgbClr val="CCCCCC"/>
                     </a:solidFill>
@@ -26598,7 +26524,7 @@
                     <a:bodyPr/>
                     <a:lstStyle/>
                     <a:p>
-                      <a:pPr indent="0" lvl="0" marL="0" marR="0" rtl="0" algn="l">
+                      <a:pPr indent="0" lvl="0" marL="0" rtl="0" algn="just">
                         <a:lnSpc>
                           <a:spcPct val="150000"/>
                         </a:lnSpc>
@@ -26608,23 +26534,18 @@
                         <a:spcAft>
                           <a:spcPts val="0"/>
                         </a:spcAft>
-                        <a:buClr>
-                          <a:srgbClr val="000000"/>
-                        </a:buClr>
-                        <a:buSzPts val="1200"/>
-                        <a:buFont typeface="Arial"/>
                         <a:buNone/>
                       </a:pPr>
                       <a:r>
-                        <a:rPr lang="es-MX" sz="1200" u="none" cap="none" strike="noStrike">
+                        <a:rPr lang="es-MX" sz="1200">
                           <a:latin typeface="Times New Roman"/>
                           <a:ea typeface="Times New Roman"/>
                           <a:cs typeface="Times New Roman"/>
                           <a:sym typeface="Times New Roman"/>
                         </a:rPr>
-                        <a:t>Consultando historial de acciones</a:t>
+                        <a:t>Reportando por cantidad de respuesta (Auditoria)</a:t>
                       </a:r>
-                      <a:endParaRPr sz="1200" u="none" cap="none" strike="noStrike">
+                      <a:endParaRPr sz="1200">
                         <a:latin typeface="Times New Roman"/>
                         <a:ea typeface="Times New Roman"/>
                         <a:cs typeface="Times New Roman"/>
@@ -26632,7 +26553,44 @@
                       </a:endParaRPr>
                     </a:p>
                   </a:txBody>
-                  <a:tcPr marT="0" marB="0" marR="68575" marL="68575"/>
+                  <a:tcPr marT="0" marB="0" marR="68575" marL="68575">
+                    <a:lnL cap="flat" cmpd="sng" w="6350">
+                      <a:solidFill>
+                        <a:srgbClr val="000000"/>
+                      </a:solidFill>
+                      <a:prstDash val="solid"/>
+                      <a:round/>
+                      <a:headEnd len="sm" w="sm" type="none"/>
+                      <a:tailEnd len="sm" w="sm" type="none"/>
+                    </a:lnL>
+                    <a:lnR cap="flat" cmpd="sng" w="6350">
+                      <a:solidFill>
+                        <a:srgbClr val="000000"/>
+                      </a:solidFill>
+                      <a:prstDash val="solid"/>
+                      <a:round/>
+                      <a:headEnd len="sm" w="sm" type="none"/>
+                      <a:tailEnd len="sm" w="sm" type="none"/>
+                    </a:lnR>
+                    <a:lnT cap="flat" cmpd="sng" w="6350">
+                      <a:solidFill>
+                        <a:srgbClr val="000000"/>
+                      </a:solidFill>
+                      <a:prstDash val="solid"/>
+                      <a:round/>
+                      <a:headEnd len="sm" w="sm" type="none"/>
+                      <a:tailEnd len="sm" w="sm" type="none"/>
+                    </a:lnT>
+                    <a:lnB cap="flat" cmpd="sng" w="6350">
+                      <a:solidFill>
+                        <a:srgbClr val="000000"/>
+                      </a:solidFill>
+                      <a:prstDash val="solid"/>
+                      <a:round/>
+                      <a:headEnd len="sm" w="sm" type="none"/>
+                      <a:tailEnd len="sm" w="sm" type="none"/>
+                    </a:lnB>
+                  </a:tcPr>
                 </a:tc>
               </a:tr>
               <a:tr h="382325">
@@ -26641,7 +26599,7 @@
                     <a:bodyPr/>
                     <a:lstStyle/>
                     <a:p>
-                      <a:pPr indent="0" lvl="0" marL="0" marR="0" rtl="0" algn="l">
+                      <a:pPr indent="0" lvl="0" marL="0" rtl="0" algn="just">
                         <a:lnSpc>
                           <a:spcPct val="150000"/>
                         </a:lnSpc>
@@ -26651,15 +26609,10 @@
                         <a:spcAft>
                           <a:spcPts val="0"/>
                         </a:spcAft>
-                        <a:buClr>
-                          <a:srgbClr val="000000"/>
-                        </a:buClr>
-                        <a:buSzPts val="1200"/>
-                        <a:buFont typeface="Arial"/>
                         <a:buNone/>
                       </a:pPr>
                       <a:r>
-                        <a:rPr lang="es-MX" sz="1200" u="none" cap="none" strike="noStrike">
+                        <a:rPr lang="es-MX" sz="1200">
                           <a:latin typeface="Times New Roman"/>
                           <a:ea typeface="Times New Roman"/>
                           <a:cs typeface="Times New Roman"/>
@@ -26667,7 +26620,7 @@
                         </a:rPr>
                         <a:t>Actor(es)</a:t>
                       </a:r>
-                      <a:endParaRPr sz="1200" u="none" cap="none" strike="noStrike">
+                      <a:endParaRPr sz="1200">
                         <a:latin typeface="Times New Roman"/>
                         <a:ea typeface="Times New Roman"/>
                         <a:cs typeface="Times New Roman"/>
@@ -26676,6 +26629,42 @@
                     </a:p>
                   </a:txBody>
                   <a:tcPr marT="0" marB="0" marR="68575" marL="68575">
+                    <a:lnL cap="flat" cmpd="sng" w="6350">
+                      <a:solidFill>
+                        <a:srgbClr val="000000"/>
+                      </a:solidFill>
+                      <a:prstDash val="solid"/>
+                      <a:round/>
+                      <a:headEnd len="sm" w="sm" type="none"/>
+                      <a:tailEnd len="sm" w="sm" type="none"/>
+                    </a:lnL>
+                    <a:lnR cap="flat" cmpd="sng" w="6350">
+                      <a:solidFill>
+                        <a:srgbClr val="000000"/>
+                      </a:solidFill>
+                      <a:prstDash val="solid"/>
+                      <a:round/>
+                      <a:headEnd len="sm" w="sm" type="none"/>
+                      <a:tailEnd len="sm" w="sm" type="none"/>
+                    </a:lnR>
+                    <a:lnT cap="flat" cmpd="sng" w="6350">
+                      <a:solidFill>
+                        <a:srgbClr val="000000"/>
+                      </a:solidFill>
+                      <a:prstDash val="solid"/>
+                      <a:round/>
+                      <a:headEnd len="sm" w="sm" type="none"/>
+                      <a:tailEnd len="sm" w="sm" type="none"/>
+                    </a:lnT>
+                    <a:lnB cap="flat" cmpd="sng" w="6350">
+                      <a:solidFill>
+                        <a:srgbClr val="000000"/>
+                      </a:solidFill>
+                      <a:prstDash val="solid"/>
+                      <a:round/>
+                      <a:headEnd len="sm" w="sm" type="none"/>
+                      <a:tailEnd len="sm" w="sm" type="none"/>
+                    </a:lnB>
                     <a:solidFill>
                       <a:srgbClr val="CCCCCC"/>
                     </a:solidFill>
@@ -26686,7 +26675,7 @@
                     <a:bodyPr/>
                     <a:lstStyle/>
                     <a:p>
-                      <a:pPr indent="0" lvl="0" marL="0" marR="0" rtl="0" algn="l">
+                      <a:pPr indent="0" lvl="0" marL="0" rtl="0" algn="just">
                         <a:lnSpc>
                           <a:spcPct val="150000"/>
                         </a:lnSpc>
@@ -26696,23 +26685,18 @@
                         <a:spcAft>
                           <a:spcPts val="0"/>
                         </a:spcAft>
-                        <a:buClr>
-                          <a:srgbClr val="000000"/>
-                        </a:buClr>
-                        <a:buSzPts val="1200"/>
-                        <a:buFont typeface="Arial"/>
                         <a:buNone/>
                       </a:pPr>
                       <a:r>
-                        <a:rPr lang="es-MX" sz="1200" u="none" cap="none" strike="noStrike">
+                        <a:rPr lang="es-MX" sz="1200">
                           <a:latin typeface="Times New Roman"/>
                           <a:ea typeface="Times New Roman"/>
                           <a:cs typeface="Times New Roman"/>
                           <a:sym typeface="Times New Roman"/>
                         </a:rPr>
-                        <a:t>Sistema</a:t>
+                        <a:t>Cliente</a:t>
                       </a:r>
-                      <a:endParaRPr sz="1200" u="none" cap="none" strike="noStrike">
+                      <a:endParaRPr sz="1200">
                         <a:latin typeface="Times New Roman"/>
                         <a:ea typeface="Times New Roman"/>
                         <a:cs typeface="Times New Roman"/>
@@ -26720,7 +26704,44 @@
                       </a:endParaRPr>
                     </a:p>
                   </a:txBody>
-                  <a:tcPr marT="0" marB="0" marR="68575" marL="68575"/>
+                  <a:tcPr marT="0" marB="0" marR="68575" marL="68575">
+                    <a:lnL cap="flat" cmpd="sng" w="6350">
+                      <a:solidFill>
+                        <a:srgbClr val="000000"/>
+                      </a:solidFill>
+                      <a:prstDash val="solid"/>
+                      <a:round/>
+                      <a:headEnd len="sm" w="sm" type="none"/>
+                      <a:tailEnd len="sm" w="sm" type="none"/>
+                    </a:lnL>
+                    <a:lnR cap="flat" cmpd="sng" w="6350">
+                      <a:solidFill>
+                        <a:srgbClr val="000000"/>
+                      </a:solidFill>
+                      <a:prstDash val="solid"/>
+                      <a:round/>
+                      <a:headEnd len="sm" w="sm" type="none"/>
+                      <a:tailEnd len="sm" w="sm" type="none"/>
+                    </a:lnR>
+                    <a:lnT cap="flat" cmpd="sng" w="6350">
+                      <a:solidFill>
+                        <a:srgbClr val="000000"/>
+                      </a:solidFill>
+                      <a:prstDash val="solid"/>
+                      <a:round/>
+                      <a:headEnd len="sm" w="sm" type="none"/>
+                      <a:tailEnd len="sm" w="sm" type="none"/>
+                    </a:lnT>
+                    <a:lnB cap="flat" cmpd="sng" w="6350">
+                      <a:solidFill>
+                        <a:srgbClr val="000000"/>
+                      </a:solidFill>
+                      <a:prstDash val="solid"/>
+                      <a:round/>
+                      <a:headEnd len="sm" w="sm" type="none"/>
+                      <a:tailEnd len="sm" w="sm" type="none"/>
+                    </a:lnB>
+                  </a:tcPr>
                 </a:tc>
               </a:tr>
               <a:tr h="382325">
@@ -26729,7 +26750,7 @@
                     <a:bodyPr/>
                     <a:lstStyle/>
                     <a:p>
-                      <a:pPr indent="0" lvl="0" marL="0" marR="0" rtl="0" algn="l">
+                      <a:pPr indent="0" lvl="0" marL="0" rtl="0" algn="just">
                         <a:lnSpc>
                           <a:spcPct val="150000"/>
                         </a:lnSpc>
@@ -26739,15 +26760,10 @@
                         <a:spcAft>
                           <a:spcPts val="0"/>
                         </a:spcAft>
-                        <a:buClr>
-                          <a:srgbClr val="000000"/>
-                        </a:buClr>
-                        <a:buSzPts val="1200"/>
-                        <a:buFont typeface="Arial"/>
                         <a:buNone/>
                       </a:pPr>
                       <a:r>
-                        <a:rPr lang="es-MX" sz="1200" u="none" cap="none" strike="noStrike">
+                        <a:rPr lang="es-MX" sz="1200">
                           <a:latin typeface="Times New Roman"/>
                           <a:ea typeface="Times New Roman"/>
                           <a:cs typeface="Times New Roman"/>
@@ -26755,7 +26771,7 @@
                         </a:rPr>
                         <a:t>Propósito</a:t>
                       </a:r>
-                      <a:endParaRPr sz="1200" u="none" cap="none" strike="noStrike">
+                      <a:endParaRPr sz="1200">
                         <a:latin typeface="Times New Roman"/>
                         <a:ea typeface="Times New Roman"/>
                         <a:cs typeface="Times New Roman"/>
@@ -26764,6 +26780,42 @@
                     </a:p>
                   </a:txBody>
                   <a:tcPr marT="0" marB="0" marR="68575" marL="68575">
+                    <a:lnL cap="flat" cmpd="sng" w="6350">
+                      <a:solidFill>
+                        <a:srgbClr val="000000"/>
+                      </a:solidFill>
+                      <a:prstDash val="solid"/>
+                      <a:round/>
+                      <a:headEnd len="sm" w="sm" type="none"/>
+                      <a:tailEnd len="sm" w="sm" type="none"/>
+                    </a:lnL>
+                    <a:lnR cap="flat" cmpd="sng" w="6350">
+                      <a:solidFill>
+                        <a:srgbClr val="000000"/>
+                      </a:solidFill>
+                      <a:prstDash val="solid"/>
+                      <a:round/>
+                      <a:headEnd len="sm" w="sm" type="none"/>
+                      <a:tailEnd len="sm" w="sm" type="none"/>
+                    </a:lnR>
+                    <a:lnT cap="flat" cmpd="sng" w="6350">
+                      <a:solidFill>
+                        <a:srgbClr val="000000"/>
+                      </a:solidFill>
+                      <a:prstDash val="solid"/>
+                      <a:round/>
+                      <a:headEnd len="sm" w="sm" type="none"/>
+                      <a:tailEnd len="sm" w="sm" type="none"/>
+                    </a:lnT>
+                    <a:lnB cap="flat" cmpd="sng" w="6350">
+                      <a:solidFill>
+                        <a:srgbClr val="000000"/>
+                      </a:solidFill>
+                      <a:prstDash val="solid"/>
+                      <a:round/>
+                      <a:headEnd len="sm" w="sm" type="none"/>
+                      <a:tailEnd len="sm" w="sm" type="none"/>
+                    </a:lnB>
                     <a:solidFill>
                       <a:srgbClr val="CCCCCC"/>
                     </a:solidFill>
@@ -26774,7 +26826,7 @@
                     <a:bodyPr/>
                     <a:lstStyle/>
                     <a:p>
-                      <a:pPr indent="0" lvl="0" marL="0" marR="0" rtl="0" algn="l">
+                      <a:pPr indent="0" lvl="0" marL="0" rtl="0" algn="just">
                         <a:lnSpc>
                           <a:spcPct val="150000"/>
                         </a:lnSpc>
@@ -26784,23 +26836,18 @@
                         <a:spcAft>
                           <a:spcPts val="0"/>
                         </a:spcAft>
-                        <a:buClr>
-                          <a:srgbClr val="000000"/>
-                        </a:buClr>
-                        <a:buSzPts val="1200"/>
-                        <a:buFont typeface="Arial"/>
                         <a:buNone/>
                       </a:pPr>
                       <a:r>
-                        <a:rPr lang="es-MX" sz="1200" u="none" cap="none" strike="noStrike">
+                        <a:rPr lang="es-MX" sz="1200">
                           <a:latin typeface="Times New Roman"/>
                           <a:ea typeface="Times New Roman"/>
                           <a:cs typeface="Times New Roman"/>
                           <a:sym typeface="Times New Roman"/>
                         </a:rPr>
-                        <a:t>Registrar acciones de actores.</a:t>
+                        <a:t>Generar un reporte que muestre la cantidad total de respuestas registradas por cada programa.</a:t>
                       </a:r>
-                      <a:endParaRPr sz="1200" u="none" cap="none" strike="noStrike">
+                      <a:endParaRPr sz="1200">
                         <a:latin typeface="Times New Roman"/>
                         <a:ea typeface="Times New Roman"/>
                         <a:cs typeface="Times New Roman"/>
@@ -26808,7 +26855,44 @@
                       </a:endParaRPr>
                     </a:p>
                   </a:txBody>
-                  <a:tcPr marT="0" marB="0" marR="68575" marL="68575"/>
+                  <a:tcPr marT="0" marB="0" marR="68575" marL="68575">
+                    <a:lnL cap="flat" cmpd="sng" w="6350">
+                      <a:solidFill>
+                        <a:srgbClr val="000000"/>
+                      </a:solidFill>
+                      <a:prstDash val="solid"/>
+                      <a:round/>
+                      <a:headEnd len="sm" w="sm" type="none"/>
+                      <a:tailEnd len="sm" w="sm" type="none"/>
+                    </a:lnL>
+                    <a:lnR cap="flat" cmpd="sng" w="6350">
+                      <a:solidFill>
+                        <a:srgbClr val="000000"/>
+                      </a:solidFill>
+                      <a:prstDash val="solid"/>
+                      <a:round/>
+                      <a:headEnd len="sm" w="sm" type="none"/>
+                      <a:tailEnd len="sm" w="sm" type="none"/>
+                    </a:lnR>
+                    <a:lnT cap="flat" cmpd="sng" w="6350">
+                      <a:solidFill>
+                        <a:srgbClr val="000000"/>
+                      </a:solidFill>
+                      <a:prstDash val="solid"/>
+                      <a:round/>
+                      <a:headEnd len="sm" w="sm" type="none"/>
+                      <a:tailEnd len="sm" w="sm" type="none"/>
+                    </a:lnT>
+                    <a:lnB cap="flat" cmpd="sng" w="6350">
+                      <a:solidFill>
+                        <a:srgbClr val="000000"/>
+                      </a:solidFill>
+                      <a:prstDash val="solid"/>
+                      <a:round/>
+                      <a:headEnd len="sm" w="sm" type="none"/>
+                      <a:tailEnd len="sm" w="sm" type="none"/>
+                    </a:lnB>
+                  </a:tcPr>
                 </a:tc>
               </a:tr>
               <a:tr h="382325">
@@ -26817,7 +26901,7 @@
                     <a:bodyPr/>
                     <a:lstStyle/>
                     <a:p>
-                      <a:pPr indent="0" lvl="0" marL="0" marR="0" rtl="0" algn="l">
+                      <a:pPr indent="0" lvl="0" marL="0" rtl="0" algn="just">
                         <a:lnSpc>
                           <a:spcPct val="150000"/>
                         </a:lnSpc>
@@ -26827,15 +26911,10 @@
                         <a:spcAft>
                           <a:spcPts val="0"/>
                         </a:spcAft>
-                        <a:buClr>
-                          <a:srgbClr val="000000"/>
-                        </a:buClr>
-                        <a:buSzPts val="1200"/>
-                        <a:buFont typeface="Arial"/>
                         <a:buNone/>
                       </a:pPr>
                       <a:r>
-                        <a:rPr lang="es-MX" sz="1200" u="none" cap="none" strike="noStrike">
+                        <a:rPr lang="es-MX" sz="1200">
                           <a:latin typeface="Times New Roman"/>
                           <a:ea typeface="Times New Roman"/>
                           <a:cs typeface="Times New Roman"/>
@@ -26843,7 +26922,7 @@
                         </a:rPr>
                         <a:t>Precondiciones</a:t>
                       </a:r>
-                      <a:endParaRPr sz="1200" u="none" cap="none" strike="noStrike">
+                      <a:endParaRPr sz="1200">
                         <a:latin typeface="Times New Roman"/>
                         <a:ea typeface="Times New Roman"/>
                         <a:cs typeface="Times New Roman"/>
@@ -26852,6 +26931,42 @@
                     </a:p>
                   </a:txBody>
                   <a:tcPr marT="0" marB="0" marR="68575" marL="68575">
+                    <a:lnL cap="flat" cmpd="sng" w="6350">
+                      <a:solidFill>
+                        <a:srgbClr val="000000"/>
+                      </a:solidFill>
+                      <a:prstDash val="solid"/>
+                      <a:round/>
+                      <a:headEnd len="sm" w="sm" type="none"/>
+                      <a:tailEnd len="sm" w="sm" type="none"/>
+                    </a:lnL>
+                    <a:lnR cap="flat" cmpd="sng" w="6350">
+                      <a:solidFill>
+                        <a:srgbClr val="000000"/>
+                      </a:solidFill>
+                      <a:prstDash val="solid"/>
+                      <a:round/>
+                      <a:headEnd len="sm" w="sm" type="none"/>
+                      <a:tailEnd len="sm" w="sm" type="none"/>
+                    </a:lnR>
+                    <a:lnT cap="flat" cmpd="sng" w="6350">
+                      <a:solidFill>
+                        <a:srgbClr val="000000"/>
+                      </a:solidFill>
+                      <a:prstDash val="solid"/>
+                      <a:round/>
+                      <a:headEnd len="sm" w="sm" type="none"/>
+                      <a:tailEnd len="sm" w="sm" type="none"/>
+                    </a:lnT>
+                    <a:lnB cap="flat" cmpd="sng" w="6350">
+                      <a:solidFill>
+                        <a:srgbClr val="000000"/>
+                      </a:solidFill>
+                      <a:prstDash val="solid"/>
+                      <a:round/>
+                      <a:headEnd len="sm" w="sm" type="none"/>
+                      <a:tailEnd len="sm" w="sm" type="none"/>
+                    </a:lnB>
                     <a:solidFill>
                       <a:srgbClr val="CCCCCC"/>
                     </a:solidFill>
@@ -26862,7 +26977,7 @@
                     <a:bodyPr/>
                     <a:lstStyle/>
                     <a:p>
-                      <a:pPr indent="0" lvl="0" marL="0" marR="0" rtl="0" algn="l">
+                      <a:pPr indent="0" lvl="0" marL="0" rtl="0" algn="just">
                         <a:lnSpc>
                           <a:spcPct val="150000"/>
                         </a:lnSpc>
@@ -26872,23 +26987,18 @@
                         <a:spcAft>
                           <a:spcPts val="0"/>
                         </a:spcAft>
-                        <a:buClr>
-                          <a:srgbClr val="000000"/>
-                        </a:buClr>
-                        <a:buSzPts val="1200"/>
-                        <a:buFont typeface="Arial"/>
                         <a:buNone/>
                       </a:pPr>
                       <a:r>
-                        <a:rPr lang="es-MX" sz="1200" u="none" cap="none" strike="noStrike">
+                        <a:rPr lang="es-MX" sz="1200">
                           <a:latin typeface="Times New Roman"/>
                           <a:ea typeface="Times New Roman"/>
                           <a:cs typeface="Times New Roman"/>
                           <a:sym typeface="Times New Roman"/>
                         </a:rPr>
-                        <a:t>Acciones realizadas.</a:t>
+                        <a:t>Formularios de  auditoría enviados y asociados a un programa.</a:t>
                       </a:r>
-                      <a:endParaRPr sz="1200" u="none" cap="none" strike="noStrike">
+                      <a:endParaRPr sz="1200">
                         <a:latin typeface="Times New Roman"/>
                         <a:ea typeface="Times New Roman"/>
                         <a:cs typeface="Times New Roman"/>
@@ -26896,7 +27006,44 @@
                       </a:endParaRPr>
                     </a:p>
                   </a:txBody>
-                  <a:tcPr marT="0" marB="0" marR="68575" marL="68575"/>
+                  <a:tcPr marT="0" marB="0" marR="68575" marL="68575">
+                    <a:lnL cap="flat" cmpd="sng" w="6350">
+                      <a:solidFill>
+                        <a:srgbClr val="000000"/>
+                      </a:solidFill>
+                      <a:prstDash val="solid"/>
+                      <a:round/>
+                      <a:headEnd len="sm" w="sm" type="none"/>
+                      <a:tailEnd len="sm" w="sm" type="none"/>
+                    </a:lnL>
+                    <a:lnR cap="flat" cmpd="sng" w="6350">
+                      <a:solidFill>
+                        <a:srgbClr val="000000"/>
+                      </a:solidFill>
+                      <a:prstDash val="solid"/>
+                      <a:round/>
+                      <a:headEnd len="sm" w="sm" type="none"/>
+                      <a:tailEnd len="sm" w="sm" type="none"/>
+                    </a:lnR>
+                    <a:lnT cap="flat" cmpd="sng" w="6350">
+                      <a:solidFill>
+                        <a:srgbClr val="000000"/>
+                      </a:solidFill>
+                      <a:prstDash val="solid"/>
+                      <a:round/>
+                      <a:headEnd len="sm" w="sm" type="none"/>
+                      <a:tailEnd len="sm" w="sm" type="none"/>
+                    </a:lnT>
+                    <a:lnB cap="flat" cmpd="sng" w="6350">
+                      <a:solidFill>
+                        <a:srgbClr val="000000"/>
+                      </a:solidFill>
+                      <a:prstDash val="solid"/>
+                      <a:round/>
+                      <a:headEnd len="sm" w="sm" type="none"/>
+                      <a:tailEnd len="sm" w="sm" type="none"/>
+                    </a:lnB>
+                  </a:tcPr>
                 </a:tc>
               </a:tr>
               <a:tr h="382325">
@@ -26905,7 +27052,7 @@
                     <a:bodyPr/>
                     <a:lstStyle/>
                     <a:p>
-                      <a:pPr indent="0" lvl="0" marL="0" marR="0" rtl="0" algn="l">
+                      <a:pPr indent="0" lvl="0" marL="0" rtl="0" algn="just">
                         <a:lnSpc>
                           <a:spcPct val="150000"/>
                         </a:lnSpc>
@@ -26915,15 +27062,10 @@
                         <a:spcAft>
                           <a:spcPts val="0"/>
                         </a:spcAft>
-                        <a:buClr>
-                          <a:srgbClr val="000000"/>
-                        </a:buClr>
-                        <a:buSzPts val="1200"/>
-                        <a:buFont typeface="Arial"/>
                         <a:buNone/>
                       </a:pPr>
                       <a:r>
-                        <a:rPr lang="es-MX" sz="1200" u="none" cap="none" strike="noStrike">
+                        <a:rPr lang="es-MX" sz="1200">
                           <a:latin typeface="Times New Roman"/>
                           <a:ea typeface="Times New Roman"/>
                           <a:cs typeface="Times New Roman"/>
@@ -26931,7 +27073,7 @@
                         </a:rPr>
                         <a:t>Postcondiciones</a:t>
                       </a:r>
-                      <a:endParaRPr sz="1200" u="none" cap="none" strike="noStrike">
+                      <a:endParaRPr sz="1200">
                         <a:latin typeface="Times New Roman"/>
                         <a:ea typeface="Times New Roman"/>
                         <a:cs typeface="Times New Roman"/>
@@ -26940,6 +27082,42 @@
                     </a:p>
                   </a:txBody>
                   <a:tcPr marT="0" marB="0" marR="68575" marL="68575">
+                    <a:lnL cap="flat" cmpd="sng" w="6350">
+                      <a:solidFill>
+                        <a:srgbClr val="000000"/>
+                      </a:solidFill>
+                      <a:prstDash val="solid"/>
+                      <a:round/>
+                      <a:headEnd len="sm" w="sm" type="none"/>
+                      <a:tailEnd len="sm" w="sm" type="none"/>
+                    </a:lnL>
+                    <a:lnR cap="flat" cmpd="sng" w="6350">
+                      <a:solidFill>
+                        <a:srgbClr val="000000"/>
+                      </a:solidFill>
+                      <a:prstDash val="solid"/>
+                      <a:round/>
+                      <a:headEnd len="sm" w="sm" type="none"/>
+                      <a:tailEnd len="sm" w="sm" type="none"/>
+                    </a:lnR>
+                    <a:lnT cap="flat" cmpd="sng" w="6350">
+                      <a:solidFill>
+                        <a:srgbClr val="000000"/>
+                      </a:solidFill>
+                      <a:prstDash val="solid"/>
+                      <a:round/>
+                      <a:headEnd len="sm" w="sm" type="none"/>
+                      <a:tailEnd len="sm" w="sm" type="none"/>
+                    </a:lnT>
+                    <a:lnB cap="flat" cmpd="sng" w="6350">
+                      <a:solidFill>
+                        <a:srgbClr val="000000"/>
+                      </a:solidFill>
+                      <a:prstDash val="solid"/>
+                      <a:round/>
+                      <a:headEnd len="sm" w="sm" type="none"/>
+                      <a:tailEnd len="sm" w="sm" type="none"/>
+                    </a:lnB>
                     <a:solidFill>
                       <a:srgbClr val="CCCCCC"/>
                     </a:solidFill>
@@ -26950,7 +27128,7 @@
                     <a:bodyPr/>
                     <a:lstStyle/>
                     <a:p>
-                      <a:pPr indent="0" lvl="0" marL="0" marR="0" rtl="0" algn="l">
+                      <a:pPr indent="0" lvl="0" marL="0" rtl="0" algn="just">
                         <a:lnSpc>
                           <a:spcPct val="150000"/>
                         </a:lnSpc>
@@ -26960,23 +27138,18 @@
                         <a:spcAft>
                           <a:spcPts val="0"/>
                         </a:spcAft>
-                        <a:buClr>
-                          <a:srgbClr val="000000"/>
-                        </a:buClr>
-                        <a:buSzPts val="1200"/>
-                        <a:buFont typeface="Arial"/>
                         <a:buNone/>
                       </a:pPr>
                       <a:r>
-                        <a:rPr lang="es-MX" sz="1200" u="none" cap="none" strike="noStrike">
+                        <a:rPr lang="es-MX" sz="1200">
                           <a:latin typeface="Times New Roman"/>
                           <a:ea typeface="Times New Roman"/>
                           <a:cs typeface="Times New Roman"/>
                           <a:sym typeface="Times New Roman"/>
                         </a:rPr>
-                        <a:t>Historial actualizado.</a:t>
+                        <a:t>Reporte visual generado.</a:t>
                       </a:r>
-                      <a:endParaRPr sz="1200" u="none" cap="none" strike="noStrike">
+                      <a:endParaRPr sz="1200">
                         <a:latin typeface="Times New Roman"/>
                         <a:ea typeface="Times New Roman"/>
                         <a:cs typeface="Times New Roman"/>
@@ -26984,7 +27157,44 @@
                       </a:endParaRPr>
                     </a:p>
                   </a:txBody>
-                  <a:tcPr marT="0" marB="0" marR="68575" marL="68575"/>
+                  <a:tcPr marT="0" marB="0" marR="68575" marL="68575">
+                    <a:lnL cap="flat" cmpd="sng" w="6350">
+                      <a:solidFill>
+                        <a:srgbClr val="000000"/>
+                      </a:solidFill>
+                      <a:prstDash val="solid"/>
+                      <a:round/>
+                      <a:headEnd len="sm" w="sm" type="none"/>
+                      <a:tailEnd len="sm" w="sm" type="none"/>
+                    </a:lnL>
+                    <a:lnR cap="flat" cmpd="sng" w="6350">
+                      <a:solidFill>
+                        <a:srgbClr val="000000"/>
+                      </a:solidFill>
+                      <a:prstDash val="solid"/>
+                      <a:round/>
+                      <a:headEnd len="sm" w="sm" type="none"/>
+                      <a:tailEnd len="sm" w="sm" type="none"/>
+                    </a:lnR>
+                    <a:lnT cap="flat" cmpd="sng" w="6350">
+                      <a:solidFill>
+                        <a:srgbClr val="000000"/>
+                      </a:solidFill>
+                      <a:prstDash val="solid"/>
+                      <a:round/>
+                      <a:headEnd len="sm" w="sm" type="none"/>
+                      <a:tailEnd len="sm" w="sm" type="none"/>
+                    </a:lnT>
+                    <a:lnB cap="flat" cmpd="sng" w="6350">
+                      <a:solidFill>
+                        <a:srgbClr val="000000"/>
+                      </a:solidFill>
+                      <a:prstDash val="solid"/>
+                      <a:round/>
+                      <a:headEnd len="sm" w="sm" type="none"/>
+                      <a:tailEnd len="sm" w="sm" type="none"/>
+                    </a:lnB>
+                  </a:tcPr>
                 </a:tc>
               </a:tr>
               <a:tr h="382325">
@@ -26993,7 +27203,7 @@
                     <a:bodyPr/>
                     <a:lstStyle/>
                     <a:p>
-                      <a:pPr indent="0" lvl="0" marL="0" marR="0" rtl="0" algn="l">
+                      <a:pPr indent="0" lvl="0" marL="0" rtl="0" algn="just">
                         <a:lnSpc>
                           <a:spcPct val="150000"/>
                         </a:lnSpc>
@@ -27003,15 +27213,10 @@
                         <a:spcAft>
                           <a:spcPts val="0"/>
                         </a:spcAft>
-                        <a:buClr>
-                          <a:srgbClr val="000000"/>
-                        </a:buClr>
-                        <a:buSzPts val="1200"/>
-                        <a:buFont typeface="Arial"/>
                         <a:buNone/>
                       </a:pPr>
                       <a:r>
-                        <a:rPr lang="es-MX" sz="1200" u="none" cap="none" strike="noStrike">
+                        <a:rPr lang="es-MX" sz="1200">
                           <a:latin typeface="Times New Roman"/>
                           <a:ea typeface="Times New Roman"/>
                           <a:cs typeface="Times New Roman"/>
@@ -27019,7 +27224,7 @@
                         </a:rPr>
                         <a:t>Resumen</a:t>
                       </a:r>
-                      <a:endParaRPr sz="1200" u="none" cap="none" strike="noStrike">
+                      <a:endParaRPr sz="1200">
                         <a:latin typeface="Times New Roman"/>
                         <a:ea typeface="Times New Roman"/>
                         <a:cs typeface="Times New Roman"/>
@@ -27028,6 +27233,42 @@
                     </a:p>
                   </a:txBody>
                   <a:tcPr marT="0" marB="0" marR="68575" marL="68575">
+                    <a:lnL cap="flat" cmpd="sng" w="6350">
+                      <a:solidFill>
+                        <a:srgbClr val="000000"/>
+                      </a:solidFill>
+                      <a:prstDash val="solid"/>
+                      <a:round/>
+                      <a:headEnd len="sm" w="sm" type="none"/>
+                      <a:tailEnd len="sm" w="sm" type="none"/>
+                    </a:lnL>
+                    <a:lnR cap="flat" cmpd="sng" w="6350">
+                      <a:solidFill>
+                        <a:srgbClr val="000000"/>
+                      </a:solidFill>
+                      <a:prstDash val="solid"/>
+                      <a:round/>
+                      <a:headEnd len="sm" w="sm" type="none"/>
+                      <a:tailEnd len="sm" w="sm" type="none"/>
+                    </a:lnR>
+                    <a:lnT cap="flat" cmpd="sng" w="6350">
+                      <a:solidFill>
+                        <a:srgbClr val="000000"/>
+                      </a:solidFill>
+                      <a:prstDash val="solid"/>
+                      <a:round/>
+                      <a:headEnd len="sm" w="sm" type="none"/>
+                      <a:tailEnd len="sm" w="sm" type="none"/>
+                    </a:lnT>
+                    <a:lnB cap="flat" cmpd="sng" w="6350">
+                      <a:solidFill>
+                        <a:srgbClr val="000000"/>
+                      </a:solidFill>
+                      <a:prstDash val="solid"/>
+                      <a:round/>
+                      <a:headEnd len="sm" w="sm" type="none"/>
+                      <a:tailEnd len="sm" w="sm" type="none"/>
+                    </a:lnB>
                     <a:solidFill>
                       <a:srgbClr val="CCCCCC"/>
                     </a:solidFill>
@@ -27038,7 +27279,7 @@
                     <a:bodyPr/>
                     <a:lstStyle/>
                     <a:p>
-                      <a:pPr indent="0" lvl="0" marL="0" marR="0" rtl="0" algn="l">
+                      <a:pPr indent="0" lvl="0" marL="0" rtl="0" algn="just">
                         <a:lnSpc>
                           <a:spcPct val="150000"/>
                         </a:lnSpc>
@@ -27048,23 +27289,18 @@
                         <a:spcAft>
                           <a:spcPts val="0"/>
                         </a:spcAft>
-                        <a:buClr>
-                          <a:srgbClr val="000000"/>
-                        </a:buClr>
-                        <a:buSzPts val="1200"/>
-                        <a:buFont typeface="Arial"/>
                         <a:buNone/>
                       </a:pPr>
                       <a:r>
-                        <a:rPr lang="es-MX" sz="1200" u="none" cap="none" strike="noStrike">
+                        <a:rPr lang="es-MX" sz="1200">
                           <a:latin typeface="Times New Roman"/>
                           <a:ea typeface="Times New Roman"/>
                           <a:cs typeface="Times New Roman"/>
                           <a:sym typeface="Times New Roman"/>
                         </a:rPr>
-                        <a:t>Sistema registra actividades.</a:t>
+                        <a:t>El actor genera un reporte con la cantidad de respuestas por programa.</a:t>
                       </a:r>
-                      <a:endParaRPr sz="1200" u="none" cap="none" strike="noStrike">
+                      <a:endParaRPr sz="1200">
                         <a:latin typeface="Times New Roman"/>
                         <a:ea typeface="Times New Roman"/>
                         <a:cs typeface="Times New Roman"/>
@@ -27072,7 +27308,44 @@
                       </a:endParaRPr>
                     </a:p>
                   </a:txBody>
-                  <a:tcPr marT="0" marB="0" marR="68575" marL="68575"/>
+                  <a:tcPr marT="0" marB="0" marR="68575" marL="68575">
+                    <a:lnL cap="flat" cmpd="sng" w="6350">
+                      <a:solidFill>
+                        <a:srgbClr val="000000"/>
+                      </a:solidFill>
+                      <a:prstDash val="solid"/>
+                      <a:round/>
+                      <a:headEnd len="sm" w="sm" type="none"/>
+                      <a:tailEnd len="sm" w="sm" type="none"/>
+                    </a:lnL>
+                    <a:lnR cap="flat" cmpd="sng" w="6350">
+                      <a:solidFill>
+                        <a:srgbClr val="000000"/>
+                      </a:solidFill>
+                      <a:prstDash val="solid"/>
+                      <a:round/>
+                      <a:headEnd len="sm" w="sm" type="none"/>
+                      <a:tailEnd len="sm" w="sm" type="none"/>
+                    </a:lnR>
+                    <a:lnT cap="flat" cmpd="sng" w="6350">
+                      <a:solidFill>
+                        <a:srgbClr val="000000"/>
+                      </a:solidFill>
+                      <a:prstDash val="solid"/>
+                      <a:round/>
+                      <a:headEnd len="sm" w="sm" type="none"/>
+                      <a:tailEnd len="sm" w="sm" type="none"/>
+                    </a:lnT>
+                    <a:lnB cap="flat" cmpd="sng" w="6350">
+                      <a:solidFill>
+                        <a:srgbClr val="000000"/>
+                      </a:solidFill>
+                      <a:prstDash val="solid"/>
+                      <a:round/>
+                      <a:headEnd len="sm" w="sm" type="none"/>
+                      <a:tailEnd len="sm" w="sm" type="none"/>
+                    </a:lnB>
+                  </a:tcPr>
                 </a:tc>
               </a:tr>
               <a:tr h="382325">
@@ -27081,7 +27354,7 @@
                     <a:bodyPr/>
                     <a:lstStyle/>
                     <a:p>
-                      <a:pPr indent="0" lvl="0" marL="0" marR="0" rtl="0" algn="l">
+                      <a:pPr indent="0" lvl="0" marL="0" rtl="0" algn="just">
                         <a:lnSpc>
                           <a:spcPct val="150000"/>
                         </a:lnSpc>
@@ -27091,15 +27364,10 @@
                         <a:spcAft>
                           <a:spcPts val="0"/>
                         </a:spcAft>
-                        <a:buClr>
-                          <a:srgbClr val="000000"/>
-                        </a:buClr>
-                        <a:buSzPts val="1200"/>
-                        <a:buFont typeface="Arial"/>
                         <a:buNone/>
                       </a:pPr>
                       <a:r>
-                        <a:rPr lang="es-MX" sz="1200" u="none" cap="none" strike="noStrike">
+                        <a:rPr lang="es-MX" sz="1200">
                           <a:latin typeface="Times New Roman"/>
                           <a:ea typeface="Times New Roman"/>
                           <a:cs typeface="Times New Roman"/>
@@ -27107,7 +27375,7 @@
                         </a:rPr>
                         <a:t>Tipo</a:t>
                       </a:r>
-                      <a:endParaRPr sz="1200" u="none" cap="none" strike="noStrike">
+                      <a:endParaRPr sz="1200">
                         <a:latin typeface="Times New Roman"/>
                         <a:ea typeface="Times New Roman"/>
                         <a:cs typeface="Times New Roman"/>
@@ -27116,6 +27384,42 @@
                     </a:p>
                   </a:txBody>
                   <a:tcPr marT="0" marB="0" marR="68575" marL="68575">
+                    <a:lnL cap="flat" cmpd="sng" w="6350">
+                      <a:solidFill>
+                        <a:srgbClr val="000000"/>
+                      </a:solidFill>
+                      <a:prstDash val="solid"/>
+                      <a:round/>
+                      <a:headEnd len="sm" w="sm" type="none"/>
+                      <a:tailEnd len="sm" w="sm" type="none"/>
+                    </a:lnL>
+                    <a:lnR cap="flat" cmpd="sng" w="6350">
+                      <a:solidFill>
+                        <a:srgbClr val="000000"/>
+                      </a:solidFill>
+                      <a:prstDash val="solid"/>
+                      <a:round/>
+                      <a:headEnd len="sm" w="sm" type="none"/>
+                      <a:tailEnd len="sm" w="sm" type="none"/>
+                    </a:lnR>
+                    <a:lnT cap="flat" cmpd="sng" w="6350">
+                      <a:solidFill>
+                        <a:srgbClr val="000000"/>
+                      </a:solidFill>
+                      <a:prstDash val="solid"/>
+                      <a:round/>
+                      <a:headEnd len="sm" w="sm" type="none"/>
+                      <a:tailEnd len="sm" w="sm" type="none"/>
+                    </a:lnT>
+                    <a:lnB cap="flat" cmpd="sng" w="6350">
+                      <a:solidFill>
+                        <a:srgbClr val="000000"/>
+                      </a:solidFill>
+                      <a:prstDash val="solid"/>
+                      <a:round/>
+                      <a:headEnd len="sm" w="sm" type="none"/>
+                      <a:tailEnd len="sm" w="sm" type="none"/>
+                    </a:lnB>
                     <a:solidFill>
                       <a:srgbClr val="CCCCCC"/>
                     </a:solidFill>
@@ -27126,7 +27430,7 @@
                     <a:bodyPr/>
                     <a:lstStyle/>
                     <a:p>
-                      <a:pPr indent="0" lvl="0" marL="0" marR="0" rtl="0" algn="l">
+                      <a:pPr indent="0" lvl="0" marL="0" rtl="0" algn="just">
                         <a:lnSpc>
                           <a:spcPct val="150000"/>
                         </a:lnSpc>
@@ -27136,15 +27440,10 @@
                         <a:spcAft>
                           <a:spcPts val="0"/>
                         </a:spcAft>
-                        <a:buClr>
-                          <a:srgbClr val="000000"/>
-                        </a:buClr>
-                        <a:buSzPts val="1200"/>
-                        <a:buFont typeface="Arial"/>
                         <a:buNone/>
                       </a:pPr>
                       <a:r>
-                        <a:rPr lang="es-MX" sz="1200" u="none" cap="none" strike="noStrike">
+                        <a:rPr lang="es-MX" sz="1200">
                           <a:latin typeface="Times New Roman"/>
                           <a:ea typeface="Times New Roman"/>
                           <a:cs typeface="Times New Roman"/>
@@ -27152,7 +27451,7 @@
                         </a:rPr>
                         <a:t>Secundario</a:t>
                       </a:r>
-                      <a:endParaRPr sz="1200" u="none" cap="none" strike="noStrike">
+                      <a:endParaRPr sz="1200">
                         <a:latin typeface="Times New Roman"/>
                         <a:ea typeface="Times New Roman"/>
                         <a:cs typeface="Times New Roman"/>
@@ -27160,7 +27459,44 @@
                       </a:endParaRPr>
                     </a:p>
                   </a:txBody>
-                  <a:tcPr marT="0" marB="0" marR="68575" marL="68575"/>
+                  <a:tcPr marT="0" marB="0" marR="68575" marL="68575">
+                    <a:lnL cap="flat" cmpd="sng" w="6350">
+                      <a:solidFill>
+                        <a:srgbClr val="000000"/>
+                      </a:solidFill>
+                      <a:prstDash val="solid"/>
+                      <a:round/>
+                      <a:headEnd len="sm" w="sm" type="none"/>
+                      <a:tailEnd len="sm" w="sm" type="none"/>
+                    </a:lnL>
+                    <a:lnR cap="flat" cmpd="sng" w="6350">
+                      <a:solidFill>
+                        <a:srgbClr val="000000"/>
+                      </a:solidFill>
+                      <a:prstDash val="solid"/>
+                      <a:round/>
+                      <a:headEnd len="sm" w="sm" type="none"/>
+                      <a:tailEnd len="sm" w="sm" type="none"/>
+                    </a:lnR>
+                    <a:lnT cap="flat" cmpd="sng" w="6350">
+                      <a:solidFill>
+                        <a:srgbClr val="000000"/>
+                      </a:solidFill>
+                      <a:prstDash val="solid"/>
+                      <a:round/>
+                      <a:headEnd len="sm" w="sm" type="none"/>
+                      <a:tailEnd len="sm" w="sm" type="none"/>
+                    </a:lnT>
+                    <a:lnB cap="flat" cmpd="sng" w="6350">
+                      <a:solidFill>
+                        <a:srgbClr val="000000"/>
+                      </a:solidFill>
+                      <a:prstDash val="solid"/>
+                      <a:round/>
+                      <a:headEnd len="sm" w="sm" type="none"/>
+                      <a:tailEnd len="sm" w="sm" type="none"/>
+                    </a:lnB>
+                  </a:tcPr>
                 </a:tc>
               </a:tr>
               <a:tr h="382325">
@@ -27169,7 +27505,7 @@
                     <a:bodyPr/>
                     <a:lstStyle/>
                     <a:p>
-                      <a:pPr indent="0" lvl="0" marL="0" marR="0" rtl="0" algn="ctr">
+                      <a:pPr indent="0" lvl="0" marL="0" rtl="0" algn="just">
                         <a:lnSpc>
                           <a:spcPct val="150000"/>
                         </a:lnSpc>
@@ -27179,15 +27515,10 @@
                         <a:spcAft>
                           <a:spcPts val="0"/>
                         </a:spcAft>
-                        <a:buClr>
-                          <a:srgbClr val="000000"/>
-                        </a:buClr>
-                        <a:buSzPts val="1200"/>
-                        <a:buFont typeface="Arial"/>
                         <a:buNone/>
                       </a:pPr>
                       <a:r>
-                        <a:rPr lang="es-MX" sz="1200" u="none" cap="none" strike="noStrike">
+                        <a:rPr lang="es-MX" sz="1200">
                           <a:latin typeface="Times New Roman"/>
                           <a:ea typeface="Times New Roman"/>
                           <a:cs typeface="Times New Roman"/>
@@ -27195,7 +27526,7 @@
                         </a:rPr>
                         <a:t>Curso normal de eventos </a:t>
                       </a:r>
-                      <a:endParaRPr sz="1200" u="none" cap="none" strike="noStrike">
+                      <a:endParaRPr sz="1200">
                         <a:latin typeface="Times New Roman"/>
                         <a:ea typeface="Times New Roman"/>
                         <a:cs typeface="Times New Roman"/>
@@ -27204,6 +27535,42 @@
                     </a:p>
                   </a:txBody>
                   <a:tcPr marT="0" marB="0" marR="68575" marL="68575">
+                    <a:lnL cap="flat" cmpd="sng" w="6350">
+                      <a:solidFill>
+                        <a:srgbClr val="000000"/>
+                      </a:solidFill>
+                      <a:prstDash val="solid"/>
+                      <a:round/>
+                      <a:headEnd len="sm" w="sm" type="none"/>
+                      <a:tailEnd len="sm" w="sm" type="none"/>
+                    </a:lnL>
+                    <a:lnR cap="flat" cmpd="sng" w="6350">
+                      <a:solidFill>
+                        <a:srgbClr val="000000"/>
+                      </a:solidFill>
+                      <a:prstDash val="solid"/>
+                      <a:round/>
+                      <a:headEnd len="sm" w="sm" type="none"/>
+                      <a:tailEnd len="sm" w="sm" type="none"/>
+                    </a:lnR>
+                    <a:lnT cap="flat" cmpd="sng" w="6350">
+                      <a:solidFill>
+                        <a:srgbClr val="000000"/>
+                      </a:solidFill>
+                      <a:prstDash val="solid"/>
+                      <a:round/>
+                      <a:headEnd len="sm" w="sm" type="none"/>
+                      <a:tailEnd len="sm" w="sm" type="none"/>
+                    </a:lnT>
+                    <a:lnB cap="flat" cmpd="sng" w="6350">
+                      <a:solidFill>
+                        <a:srgbClr val="000000"/>
+                      </a:solidFill>
+                      <a:prstDash val="solid"/>
+                      <a:round/>
+                      <a:headEnd len="sm" w="sm" type="none"/>
+                      <a:tailEnd len="sm" w="sm" type="none"/>
+                    </a:lnB>
                     <a:solidFill>
                       <a:srgbClr val="CCCCCC"/>
                     </a:solidFill>
@@ -27217,7 +27584,7 @@
                     <a:bodyPr/>
                     <a:lstStyle/>
                     <a:p>
-                      <a:pPr indent="0" lvl="0" marL="0" marR="0" rtl="0" algn="l">
+                      <a:pPr indent="0" lvl="0" marL="0" rtl="0" algn="just">
                         <a:lnSpc>
                           <a:spcPct val="150000"/>
                         </a:lnSpc>
@@ -27227,15 +27594,10 @@
                         <a:spcAft>
                           <a:spcPts val="0"/>
                         </a:spcAft>
-                        <a:buClr>
-                          <a:srgbClr val="000000"/>
-                        </a:buClr>
-                        <a:buSzPts val="1200"/>
-                        <a:buFont typeface="Arial"/>
                         <a:buNone/>
                       </a:pPr>
                       <a:r>
-                        <a:rPr lang="es-MX" sz="1200" u="none" cap="none" strike="noStrike">
+                        <a:rPr lang="es-MX" sz="1200">
                           <a:latin typeface="Times New Roman"/>
                           <a:ea typeface="Times New Roman"/>
                           <a:cs typeface="Times New Roman"/>
@@ -27243,7 +27605,7 @@
                         </a:rPr>
                         <a:t>Acción del Actor</a:t>
                       </a:r>
-                      <a:endParaRPr sz="1200" u="none" cap="none" strike="noStrike">
+                      <a:endParaRPr sz="1200">
                         <a:latin typeface="Times New Roman"/>
                         <a:ea typeface="Times New Roman"/>
                         <a:cs typeface="Times New Roman"/>
@@ -27252,6 +27614,42 @@
                     </a:p>
                   </a:txBody>
                   <a:tcPr marT="0" marB="0" marR="68575" marL="68575">
+                    <a:lnL cap="flat" cmpd="sng" w="6350">
+                      <a:solidFill>
+                        <a:srgbClr val="000000"/>
+                      </a:solidFill>
+                      <a:prstDash val="solid"/>
+                      <a:round/>
+                      <a:headEnd len="sm" w="sm" type="none"/>
+                      <a:tailEnd len="sm" w="sm" type="none"/>
+                    </a:lnL>
+                    <a:lnR cap="flat" cmpd="sng" w="6350">
+                      <a:solidFill>
+                        <a:srgbClr val="000000"/>
+                      </a:solidFill>
+                      <a:prstDash val="solid"/>
+                      <a:round/>
+                      <a:headEnd len="sm" w="sm" type="none"/>
+                      <a:tailEnd len="sm" w="sm" type="none"/>
+                    </a:lnR>
+                    <a:lnT cap="flat" cmpd="sng" w="6350">
+                      <a:solidFill>
+                        <a:srgbClr val="000000"/>
+                      </a:solidFill>
+                      <a:prstDash val="solid"/>
+                      <a:round/>
+                      <a:headEnd len="sm" w="sm" type="none"/>
+                      <a:tailEnd len="sm" w="sm" type="none"/>
+                    </a:lnT>
+                    <a:lnB cap="flat" cmpd="sng" w="6350">
+                      <a:solidFill>
+                        <a:srgbClr val="000000"/>
+                      </a:solidFill>
+                      <a:prstDash val="solid"/>
+                      <a:round/>
+                      <a:headEnd len="sm" w="sm" type="none"/>
+                      <a:tailEnd len="sm" w="sm" type="none"/>
+                    </a:lnB>
                     <a:solidFill>
                       <a:srgbClr val="CCCCCC"/>
                     </a:solidFill>
@@ -27262,7 +27660,7 @@
                     <a:bodyPr/>
                     <a:lstStyle/>
                     <a:p>
-                      <a:pPr indent="0" lvl="0" marL="0" marR="0" rtl="0" algn="l">
+                      <a:pPr indent="0" lvl="0" marL="0" rtl="0" algn="just">
                         <a:lnSpc>
                           <a:spcPct val="150000"/>
                         </a:lnSpc>
@@ -27272,15 +27670,10 @@
                         <a:spcAft>
                           <a:spcPts val="0"/>
                         </a:spcAft>
-                        <a:buClr>
-                          <a:srgbClr val="000000"/>
-                        </a:buClr>
-                        <a:buSzPts val="1200"/>
-                        <a:buFont typeface="Arial"/>
                         <a:buNone/>
                       </a:pPr>
                       <a:r>
-                        <a:rPr lang="es-MX" sz="1200" u="none" cap="none" strike="noStrike">
+                        <a:rPr lang="es-MX" sz="1200">
                           <a:latin typeface="Times New Roman"/>
                           <a:ea typeface="Times New Roman"/>
                           <a:cs typeface="Times New Roman"/>
@@ -27288,7 +27681,7 @@
                         </a:rPr>
                         <a:t>Respuesta del Sistema</a:t>
                       </a:r>
-                      <a:endParaRPr sz="1200" u="none" cap="none" strike="noStrike">
+                      <a:endParaRPr sz="1200">
                         <a:latin typeface="Times New Roman"/>
                         <a:ea typeface="Times New Roman"/>
                         <a:cs typeface="Times New Roman"/>
@@ -27297,19 +27690,55 @@
                     </a:p>
                   </a:txBody>
                   <a:tcPr marT="0" marB="0" marR="68575" marL="68575">
+                    <a:lnL cap="flat" cmpd="sng" w="6350">
+                      <a:solidFill>
+                        <a:srgbClr val="000000"/>
+                      </a:solidFill>
+                      <a:prstDash val="solid"/>
+                      <a:round/>
+                      <a:headEnd len="sm" w="sm" type="none"/>
+                      <a:tailEnd len="sm" w="sm" type="none"/>
+                    </a:lnL>
+                    <a:lnR cap="flat" cmpd="sng" w="6350">
+                      <a:solidFill>
+                        <a:srgbClr val="000000"/>
+                      </a:solidFill>
+                      <a:prstDash val="solid"/>
+                      <a:round/>
+                      <a:headEnd len="sm" w="sm" type="none"/>
+                      <a:tailEnd len="sm" w="sm" type="none"/>
+                    </a:lnR>
+                    <a:lnT cap="flat" cmpd="sng" w="6350">
+                      <a:solidFill>
+                        <a:srgbClr val="000000"/>
+                      </a:solidFill>
+                      <a:prstDash val="solid"/>
+                      <a:round/>
+                      <a:headEnd len="sm" w="sm" type="none"/>
+                      <a:tailEnd len="sm" w="sm" type="none"/>
+                    </a:lnT>
+                    <a:lnB cap="flat" cmpd="sng" w="6350">
+                      <a:solidFill>
+                        <a:srgbClr val="000000"/>
+                      </a:solidFill>
+                      <a:prstDash val="solid"/>
+                      <a:round/>
+                      <a:headEnd len="sm" w="sm" type="none"/>
+                      <a:tailEnd len="sm" w="sm" type="none"/>
+                    </a:lnB>
                     <a:solidFill>
                       <a:srgbClr val="CCCCCC"/>
                     </a:solidFill>
                   </a:tcPr>
                 </a:tc>
               </a:tr>
-              <a:tr h="1147000">
+              <a:tr h="938200">
                 <a:tc>
                   <a:txBody>
                     <a:bodyPr/>
                     <a:lstStyle/>
                     <a:p>
-                      <a:pPr indent="0" lvl="0" marL="0" marR="0" rtl="0" algn="l">
+                      <a:pPr indent="0" lvl="0" marL="0" rtl="0" algn="just">
                         <a:lnSpc>
                           <a:spcPct val="150000"/>
                         </a:lnSpc>
@@ -27319,23 +27748,18 @@
                         <a:spcAft>
                           <a:spcPts val="0"/>
                         </a:spcAft>
-                        <a:buClr>
-                          <a:srgbClr val="000000"/>
-                        </a:buClr>
-                        <a:buSzPts val="1200"/>
-                        <a:buFont typeface="Arial"/>
                         <a:buNone/>
                       </a:pPr>
                       <a:r>
-                        <a:rPr lang="es-MX" sz="1200" u="none" cap="none" strike="noStrike">
+                        <a:rPr lang="es-MX" sz="1200">
                           <a:latin typeface="Times New Roman"/>
                           <a:ea typeface="Times New Roman"/>
                           <a:cs typeface="Times New Roman"/>
                           <a:sym typeface="Times New Roman"/>
                         </a:rPr>
-                        <a:t>1. Acción: El actor realiza una acción (sube, edita o elimina un documento).</a:t>
+                        <a:t>1. Acción: El actor accede al Dashboard.</a:t>
                       </a:r>
-                      <a:endParaRPr sz="1200" u="none" cap="none" strike="noStrike">
+                      <a:endParaRPr sz="1200">
                         <a:latin typeface="Times New Roman"/>
                         <a:ea typeface="Times New Roman"/>
                         <a:cs typeface="Times New Roman"/>
@@ -27343,7 +27767,7 @@
                       </a:endParaRPr>
                     </a:p>
                     <a:p>
-                      <a:pPr indent="0" lvl="0" marL="0" marR="0" rtl="0" algn="l">
+                      <a:pPr indent="0" lvl="0" marL="0" rtl="0" algn="just">
                         <a:lnSpc>
                           <a:spcPct val="150000"/>
                         </a:lnSpc>
@@ -27353,17 +27777,12 @@
                         <a:spcAft>
                           <a:spcPts val="0"/>
                         </a:spcAft>
-                        <a:buClr>
-                          <a:srgbClr val="000000"/>
-                        </a:buClr>
-                        <a:buSzPts val="1200"/>
-                        <a:buFont typeface="Arial"/>
                         <a:buNone/>
                       </a:pPr>
                       <a:r>
                         <a:t/>
                       </a:r>
-                      <a:endParaRPr sz="1200" u="none" cap="none" strike="noStrike">
+                      <a:endParaRPr sz="1200">
                         <a:latin typeface="Times New Roman"/>
                         <a:ea typeface="Times New Roman"/>
                         <a:cs typeface="Times New Roman"/>
@@ -27371,14 +27790,51 @@
                       </a:endParaRPr>
                     </a:p>
                   </a:txBody>
-                  <a:tcPr marT="0" marB="0" marR="68575" marL="68575"/>
+                  <a:tcPr marT="0" marB="0" marR="68575" marL="68575">
+                    <a:lnL cap="flat" cmpd="sng" w="6350">
+                      <a:solidFill>
+                        <a:srgbClr val="000000"/>
+                      </a:solidFill>
+                      <a:prstDash val="solid"/>
+                      <a:round/>
+                      <a:headEnd len="sm" w="sm" type="none"/>
+                      <a:tailEnd len="sm" w="sm" type="none"/>
+                    </a:lnL>
+                    <a:lnR cap="flat" cmpd="sng" w="6350">
+                      <a:solidFill>
+                        <a:srgbClr val="000000"/>
+                      </a:solidFill>
+                      <a:prstDash val="solid"/>
+                      <a:round/>
+                      <a:headEnd len="sm" w="sm" type="none"/>
+                      <a:tailEnd len="sm" w="sm" type="none"/>
+                    </a:lnR>
+                    <a:lnT cap="flat" cmpd="sng" w="6350">
+                      <a:solidFill>
+                        <a:srgbClr val="000000"/>
+                      </a:solidFill>
+                      <a:prstDash val="solid"/>
+                      <a:round/>
+                      <a:headEnd len="sm" w="sm" type="none"/>
+                      <a:tailEnd len="sm" w="sm" type="none"/>
+                    </a:lnT>
+                    <a:lnB cap="flat" cmpd="sng" w="6350">
+                      <a:solidFill>
+                        <a:srgbClr val="000000"/>
+                      </a:solidFill>
+                      <a:prstDash val="solid"/>
+                      <a:round/>
+                      <a:headEnd len="sm" w="sm" type="none"/>
+                      <a:tailEnd len="sm" w="sm" type="none"/>
+                    </a:lnB>
+                  </a:tcPr>
                 </a:tc>
                 <a:tc>
                   <a:txBody>
                     <a:bodyPr/>
                     <a:lstStyle/>
                     <a:p>
-                      <a:pPr indent="0" lvl="0" marL="0" marR="0" rtl="0" algn="l">
+                      <a:pPr indent="0" lvl="0" marL="0" rtl="0" algn="just">
                         <a:lnSpc>
                           <a:spcPct val="150000"/>
                         </a:lnSpc>
@@ -27388,23 +27844,64 @@
                         <a:spcAft>
                           <a:spcPts val="0"/>
                         </a:spcAft>
-                        <a:buClr>
-                          <a:srgbClr val="000000"/>
-                        </a:buClr>
-                        <a:buSzPts val="1200"/>
-                        <a:buFont typeface="Arial"/>
                         <a:buNone/>
                       </a:pPr>
                       <a:r>
-                        <a:rPr lang="es-MX" sz="1200" u="none" cap="none" strike="noStrike">
+                        <a:rPr lang="es-MX" sz="1200">
                           <a:latin typeface="Times New Roman"/>
                           <a:ea typeface="Times New Roman"/>
                           <a:cs typeface="Times New Roman"/>
                           <a:sym typeface="Times New Roman"/>
                         </a:rPr>
-                        <a:t>2. Respuesta: El sistema registra automáticamente la acción (sube, edita o elimina un documento).</a:t>
+                        <a:t>2. Respuesta: El sistema actualiza el Dashboard y muestra el reporte visual generado con la cantidad total de respuestas por programa.</a:t>
                       </a:r>
-                      <a:endParaRPr sz="1200" u="none" cap="none" strike="noStrike">
+                      <a:endParaRPr sz="1200">
+                        <a:latin typeface="Times New Roman"/>
+                        <a:ea typeface="Times New Roman"/>
+                        <a:cs typeface="Times New Roman"/>
+                        <a:sym typeface="Times New Roman"/>
+                      </a:endParaRPr>
+                    </a:p>
+                    <a:p>
+                      <a:pPr indent="0" lvl="0" marL="0" rtl="0" algn="just">
+                        <a:lnSpc>
+                          <a:spcPct val="150000"/>
+                        </a:lnSpc>
+                        <a:spcBef>
+                          <a:spcPts val="0"/>
+                        </a:spcBef>
+                        <a:spcAft>
+                          <a:spcPts val="0"/>
+                        </a:spcAft>
+                        <a:buNone/>
+                      </a:pPr>
+                      <a:r>
+                        <a:t/>
+                      </a:r>
+                      <a:endParaRPr sz="1200">
+                        <a:latin typeface="Times New Roman"/>
+                        <a:ea typeface="Times New Roman"/>
+                        <a:cs typeface="Times New Roman"/>
+                        <a:sym typeface="Times New Roman"/>
+                      </a:endParaRPr>
+                    </a:p>
+                    <a:p>
+                      <a:pPr indent="0" lvl="0" marL="0" rtl="0" algn="just">
+                        <a:lnSpc>
+                          <a:spcPct val="150000"/>
+                        </a:lnSpc>
+                        <a:spcBef>
+                          <a:spcPts val="0"/>
+                        </a:spcBef>
+                        <a:spcAft>
+                          <a:spcPts val="0"/>
+                        </a:spcAft>
+                        <a:buNone/>
+                      </a:pPr>
+                      <a:r>
+                        <a:t/>
+                      </a:r>
+                      <a:endParaRPr sz="1200">
                         <a:latin typeface="Times New Roman"/>
                         <a:ea typeface="Times New Roman"/>
                         <a:cs typeface="Times New Roman"/>
@@ -27412,7 +27909,44 @@
                       </a:endParaRPr>
                     </a:p>
                   </a:txBody>
-                  <a:tcPr marT="0" marB="0" marR="68575" marL="68575"/>
+                  <a:tcPr marT="0" marB="0" marR="68575" marL="68575">
+                    <a:lnL cap="flat" cmpd="sng" w="6350">
+                      <a:solidFill>
+                        <a:srgbClr val="000000"/>
+                      </a:solidFill>
+                      <a:prstDash val="solid"/>
+                      <a:round/>
+                      <a:headEnd len="sm" w="sm" type="none"/>
+                      <a:tailEnd len="sm" w="sm" type="none"/>
+                    </a:lnL>
+                    <a:lnR cap="flat" cmpd="sng" w="6350">
+                      <a:solidFill>
+                        <a:srgbClr val="000000"/>
+                      </a:solidFill>
+                      <a:prstDash val="solid"/>
+                      <a:round/>
+                      <a:headEnd len="sm" w="sm" type="none"/>
+                      <a:tailEnd len="sm" w="sm" type="none"/>
+                    </a:lnR>
+                    <a:lnT cap="flat" cmpd="sng" w="6350">
+                      <a:solidFill>
+                        <a:srgbClr val="000000"/>
+                      </a:solidFill>
+                      <a:prstDash val="solid"/>
+                      <a:round/>
+                      <a:headEnd len="sm" w="sm" type="none"/>
+                      <a:tailEnd len="sm" w="sm" type="none"/>
+                    </a:lnT>
+                    <a:lnB cap="flat" cmpd="sng" w="6350">
+                      <a:solidFill>
+                        <a:srgbClr val="000000"/>
+                      </a:solidFill>
+                      <a:prstDash val="solid"/>
+                      <a:round/>
+                      <a:headEnd len="sm" w="sm" type="none"/>
+                      <a:tailEnd len="sm" w="sm" type="none"/>
+                    </a:lnB>
+                  </a:tcPr>
                 </a:tc>
               </a:tr>
             </a:tbl>
@@ -27471,7 +28005,27 @@
                 <a:cs typeface="Arial"/>
                 <a:sym typeface="Arial"/>
               </a:rPr>
-              <a:t>Ejemplo de caso de uso de una muestra de 60 casos de uso.</a:t>
+              <a:t>Ejemplo de caso de uso de una muestra de </a:t>
+            </a:r>
+            <a:r>
+              <a:rPr lang="es-MX" sz="2700">
+                <a:solidFill>
+                  <a:schemeClr val="dk1"/>
+                </a:solidFill>
+              </a:rPr>
+              <a:t>52</a:t>
+            </a:r>
+            <a:r>
+              <a:rPr b="0" i="0" lang="es-MX" sz="2700" u="none" cap="none" strike="noStrike">
+                <a:solidFill>
+                  <a:schemeClr val="dk1"/>
+                </a:solidFill>
+                <a:latin typeface="Arial"/>
+                <a:ea typeface="Arial"/>
+                <a:cs typeface="Arial"/>
+                <a:sym typeface="Arial"/>
+              </a:rPr>
+              <a:t> casos de uso.</a:t>
             </a:r>
             <a:endParaRPr b="0" i="0" sz="2700" u="none" cap="none" strike="noStrike">
               <a:solidFill>
@@ -27661,7 +28215,7 @@
             <a:gsLst>
               <a:gs pos="0">
                 <a:srgbClr val="156082">
-                  <a:alpha val="49019"/>
+                  <a:alpha val="48627"/>
                 </a:srgbClr>
               </a:gs>
               <a:gs pos="100000">
@@ -27732,7 +28286,7 @@
             <a:gsLst>
               <a:gs pos="0">
                 <a:srgbClr val="000000">
-                  <a:alpha val="58039"/>
+                  <a:alpha val="57647"/>
                 </a:srgbClr>
               </a:gs>
               <a:gs pos="69000">
@@ -27860,7 +28414,7 @@
               </a:gs>
               <a:gs pos="100000">
                 <a:srgbClr val="0F4861">
-                  <a:alpha val="25098"/>
+                  <a:alpha val="24705"/>
                 </a:srgbClr>
               </a:gs>
             </a:gsLst>
@@ -28017,17 +28571,18 @@
           <p:cNvPicPr preferRelativeResize="0"/>
           <p:nvPr/>
         </p:nvPicPr>
-        <p:blipFill rotWithShape="1">
+        <p:blipFill>
           <a:blip r:embed="rId3">
             <a:alphaModFix/>
           </a:blip>
-          <a:srcRect b="0" l="0" r="0" t="0"/>
-          <a:stretch/>
+          <a:stretch>
+            <a:fillRect/>
+          </a:stretch>
         </p:blipFill>
         <p:spPr>
           <a:xfrm>
-            <a:off x="5223725" y="194350"/>
-            <a:ext cx="6220575" cy="6374800"/>
+            <a:off x="4277475" y="0"/>
+            <a:ext cx="7821089" cy="6875825"/>
           </a:xfrm>
           <a:prstGeom prst="rect">
             <a:avLst/>
@@ -28214,7 +28769,7 @@
             <a:gsLst>
               <a:gs pos="0">
                 <a:srgbClr val="156082">
-                  <a:alpha val="49019"/>
+                  <a:alpha val="48627"/>
                 </a:srgbClr>
               </a:gs>
               <a:gs pos="100000">
@@ -28285,7 +28840,7 @@
             <a:gsLst>
               <a:gs pos="0">
                 <a:srgbClr val="000000">
-                  <a:alpha val="58039"/>
+                  <a:alpha val="57647"/>
                 </a:srgbClr>
               </a:gs>
               <a:gs pos="69000">
@@ -28413,7 +28968,7 @@
               </a:gs>
               <a:gs pos="100000">
                 <a:srgbClr val="0F4861">
-                  <a:alpha val="25098"/>
+                  <a:alpha val="24705"/>
                 </a:srgbClr>
               </a:gs>
             </a:gsLst>
@@ -28538,17 +29093,18 @@
           <p:cNvPicPr preferRelativeResize="0"/>
           <p:nvPr/>
         </p:nvPicPr>
-        <p:blipFill rotWithShape="1">
+        <p:blipFill>
           <a:blip r:embed="rId3">
             <a:alphaModFix/>
           </a:blip>
-          <a:srcRect b="0" l="0" r="0" t="0"/>
-          <a:stretch/>
+          <a:stretch>
+            <a:fillRect/>
+          </a:stretch>
         </p:blipFill>
         <p:spPr>
           <a:xfrm>
-            <a:off x="4143850" y="1745513"/>
-            <a:ext cx="7805675" cy="3000267"/>
+            <a:off x="4992375" y="1816113"/>
+            <a:ext cx="6126800" cy="3243600"/>
           </a:xfrm>
           <a:prstGeom prst="rect">
             <a:avLst/>
@@ -28593,7 +29149,7 @@
       </p:grpSpPr>
       <p:sp>
         <p:nvSpPr>
-          <p:cNvPr id="269" name="Google Shape;269;p16"/>
+          <p:cNvPr id="269" name="Google Shape;269;p17"/>
           <p:cNvSpPr/>
           <p:nvPr/>
         </p:nvSpPr>
@@ -28652,7 +29208,7 @@
       </p:sp>
       <p:sp>
         <p:nvSpPr>
-          <p:cNvPr id="270" name="Google Shape;270;p16"/>
+          <p:cNvPr id="270" name="Google Shape;270;p17"/>
           <p:cNvSpPr/>
           <p:nvPr/>
         </p:nvSpPr>
@@ -28719,7 +29275,7 @@
       </p:sp>
       <p:sp>
         <p:nvSpPr>
-          <p:cNvPr id="271" name="Google Shape;271;p16"/>
+          <p:cNvPr id="271" name="Google Shape;271;p17"/>
           <p:cNvSpPr/>
           <p:nvPr/>
         </p:nvSpPr>
@@ -28735,7 +29291,7 @@
             <a:gsLst>
               <a:gs pos="0">
                 <a:srgbClr val="156082">
-                  <a:alpha val="49019"/>
+                  <a:alpha val="48627"/>
                 </a:srgbClr>
               </a:gs>
               <a:gs pos="100000">
@@ -28790,7 +29346,7 @@
       </p:sp>
       <p:sp>
         <p:nvSpPr>
-          <p:cNvPr id="272" name="Google Shape;272;p16"/>
+          <p:cNvPr id="272" name="Google Shape;272;p17"/>
           <p:cNvSpPr/>
           <p:nvPr/>
         </p:nvSpPr>
@@ -28806,7 +29362,7 @@
             <a:gsLst>
               <a:gs pos="0">
                 <a:srgbClr val="000000">
-                  <a:alpha val="58039"/>
+                  <a:alpha val="57647"/>
                 </a:srgbClr>
               </a:gs>
               <a:gs pos="69000">
@@ -28866,7 +29422,7 @@
       </p:sp>
       <p:sp>
         <p:nvSpPr>
-          <p:cNvPr id="273" name="Google Shape;273;p16"/>
+          <p:cNvPr id="273" name="Google Shape;273;p17"/>
           <p:cNvSpPr/>
           <p:nvPr/>
         </p:nvSpPr>
@@ -28934,7 +29490,7 @@
               </a:gs>
               <a:gs pos="100000">
                 <a:srgbClr val="0F4861">
-                  <a:alpha val="25098"/>
+                  <a:alpha val="24705"/>
                 </a:srgbClr>
               </a:gs>
             </a:gsLst>
@@ -28984,7 +29540,7 @@
       </p:sp>
       <p:sp>
         <p:nvSpPr>
-          <p:cNvPr id="274" name="Google Shape;274;p16"/>
+          <p:cNvPr id="274" name="Google Shape;274;p17"/>
           <p:cNvSpPr txBox="1"/>
           <p:nvPr>
             <p:ph type="title"/>
@@ -29079,7 +29635,7 @@
                   <a:srgbClr val="FFFFFF"/>
                 </a:solidFill>
               </a:rPr>
-              <a:t>Supervisor</a:t>
+              <a:t>Sistema</a:t>
             </a:r>
             <a:endParaRPr b="1" i="1" sz="3600"/>
           </a:p>
@@ -29087,21 +29643,22 @@
       </p:sp>
       <p:pic>
         <p:nvPicPr>
-          <p:cNvPr id="275" name="Google Shape;275;p16"/>
+          <p:cNvPr id="275" name="Google Shape;275;p17"/>
           <p:cNvPicPr preferRelativeResize="0"/>
           <p:nvPr/>
         </p:nvPicPr>
-        <p:blipFill rotWithShape="1">
+        <p:blipFill>
           <a:blip r:embed="rId3">
             <a:alphaModFix/>
           </a:blip>
-          <a:srcRect b="0" l="0" r="0" t="0"/>
-          <a:stretch/>
+          <a:stretch>
+            <a:fillRect/>
+          </a:stretch>
         </p:blipFill>
         <p:spPr>
           <a:xfrm>
-            <a:off x="4135000" y="2351025"/>
-            <a:ext cx="7904600" cy="1928875"/>
+            <a:off x="5097575" y="1223023"/>
+            <a:ext cx="6418950" cy="4045250"/>
           </a:xfrm>
           <a:prstGeom prst="rect">
             <a:avLst/>
@@ -29126,7 +29683,7 @@
     <p:bg>
       <p:bgPr>
         <a:solidFill>
-          <a:schemeClr val="lt1"/>
+          <a:schemeClr val="dk1"/>
         </a:solidFill>
       </p:bgPr>
     </p:bg>
@@ -29146,7 +29703,7 @@
       </p:grpSpPr>
       <p:sp>
         <p:nvSpPr>
-          <p:cNvPr id="280" name="Google Shape;280;p17"/>
+          <p:cNvPr id="280" name="Google Shape;280;g3515db5e1ac_7_5"/>
           <p:cNvSpPr/>
           <p:nvPr/>
         </p:nvSpPr>
@@ -29159,7 +29716,7 @@
             <a:avLst/>
           </a:prstGeom>
           <a:solidFill>
-            <a:schemeClr val="lt1"/>
+            <a:srgbClr val="000000"/>
           </a:solidFill>
           <a:ln>
             <a:noFill/>
@@ -29203,341 +29760,36 @@
           </a:p>
         </p:txBody>
       </p:sp>
-      <p:sp>
-        <p:nvSpPr>
-          <p:cNvPr id="281" name="Google Shape;281;p17"/>
-          <p:cNvSpPr/>
+      <p:pic>
+        <p:nvPicPr>
+          <p:cNvPr descr="Lupa resalta un rendimiento económico decreciente" id="281" name="Google Shape;281;g3515db5e1ac_7_5"/>
+          <p:cNvPicPr preferRelativeResize="0"/>
           <p:nvPr/>
-        </p:nvSpPr>
+        </p:nvPicPr>
+        <p:blipFill rotWithShape="1">
+          <a:blip r:embed="rId3">
+            <a:alphaModFix amt="35000"/>
+          </a:blip>
+          <a:srcRect b="6715" l="0" r="0" t="9016"/>
+          <a:stretch/>
+        </p:blipFill>
         <p:spPr>
-          <a:xfrm flipH="1" rot="5400000">
-            <a:off x="-1417539" y="1417538"/>
-            <a:ext cx="6875818" cy="4040744"/>
+          <a:xfrm>
+            <a:off x="7" y="10"/>
+            <a:ext cx="12191980" cy="6857989"/>
           </a:xfrm>
           <a:prstGeom prst="rect">
             <a:avLst/>
           </a:prstGeom>
-          <a:gradFill>
-            <a:gsLst>
-              <a:gs pos="0">
-                <a:srgbClr val="000000"/>
-              </a:gs>
-              <a:gs pos="100000">
-                <a:srgbClr val="0F4861"/>
-              </a:gs>
-            </a:gsLst>
-            <a:lin ang="18600000" scaled="0"/>
-          </a:gradFill>
+          <a:noFill/>
           <a:ln>
             <a:noFill/>
           </a:ln>
         </p:spPr>
-        <p:txBody>
-          <a:bodyPr anchorCtr="0" anchor="ctr" bIns="45700" lIns="91425" spcFirstLastPara="1" rIns="91425" wrap="square" tIns="45700">
-            <a:noAutofit/>
-          </a:bodyPr>
-          <a:lstStyle/>
-          <a:p>
-            <a:pPr indent="0" lvl="0" marL="0" marR="0" rtl="0" algn="ctr">
-              <a:lnSpc>
-                <a:spcPct val="100000"/>
-              </a:lnSpc>
-              <a:spcBef>
-                <a:spcPts val="0"/>
-              </a:spcBef>
-              <a:spcAft>
-                <a:spcPts val="0"/>
-              </a:spcAft>
-              <a:buClr>
-                <a:srgbClr val="000000"/>
-              </a:buClr>
-              <a:buSzPts val="1800"/>
-              <a:buFont typeface="Arial"/>
-              <a:buNone/>
-            </a:pPr>
-            <a:r>
-              <a:t/>
-            </a:r>
-            <a:endParaRPr b="0" i="0" sz="1800" u="none" cap="none" strike="noStrike">
-              <a:solidFill>
-                <a:schemeClr val="lt1"/>
-              </a:solidFill>
-              <a:latin typeface="Arial"/>
-              <a:ea typeface="Arial"/>
-              <a:cs typeface="Arial"/>
-              <a:sym typeface="Arial"/>
-            </a:endParaRPr>
-          </a:p>
-        </p:txBody>
-      </p:sp>
+      </p:pic>
       <p:sp>
         <p:nvSpPr>
-          <p:cNvPr id="282" name="Google Shape;282;p17"/>
-          <p:cNvSpPr/>
-          <p:nvPr/>
-        </p:nvSpPr>
-        <p:spPr>
-          <a:xfrm rot="-5400000">
-            <a:off x="-158495" y="2660473"/>
-            <a:ext cx="4355594" cy="4038603"/>
-          </a:xfrm>
-          <a:prstGeom prst="rect">
-            <a:avLst/>
-          </a:prstGeom>
-          <a:gradFill>
-            <a:gsLst>
-              <a:gs pos="0">
-                <a:srgbClr val="156082">
-                  <a:alpha val="49019"/>
-                </a:srgbClr>
-              </a:gs>
-              <a:gs pos="100000">
-                <a:srgbClr val="0A3041">
-                  <a:alpha val="0"/>
-                </a:srgbClr>
-              </a:gs>
-            </a:gsLst>
-            <a:lin ang="11400000" scaled="0"/>
-          </a:gradFill>
-          <a:ln>
-            <a:noFill/>
-          </a:ln>
-        </p:spPr>
-        <p:txBody>
-          <a:bodyPr anchorCtr="0" anchor="ctr" bIns="45700" lIns="91425" spcFirstLastPara="1" rIns="91425" wrap="square" tIns="45700">
-            <a:noAutofit/>
-          </a:bodyPr>
-          <a:lstStyle/>
-          <a:p>
-            <a:pPr indent="0" lvl="0" marL="0" marR="0" rtl="0" algn="ctr">
-              <a:lnSpc>
-                <a:spcPct val="100000"/>
-              </a:lnSpc>
-              <a:spcBef>
-                <a:spcPts val="0"/>
-              </a:spcBef>
-              <a:spcAft>
-                <a:spcPts val="0"/>
-              </a:spcAft>
-              <a:buClr>
-                <a:srgbClr val="000000"/>
-              </a:buClr>
-              <a:buSzPts val="1800"/>
-              <a:buFont typeface="Arial"/>
-              <a:buNone/>
-            </a:pPr>
-            <a:r>
-              <a:t/>
-            </a:r>
-            <a:endParaRPr b="0" i="0" sz="1800" u="none" cap="none" strike="noStrike">
-              <a:solidFill>
-                <a:schemeClr val="lt1"/>
-              </a:solidFill>
-              <a:latin typeface="Arial"/>
-              <a:ea typeface="Arial"/>
-              <a:cs typeface="Arial"/>
-              <a:sym typeface="Arial"/>
-            </a:endParaRPr>
-          </a:p>
-        </p:txBody>
-      </p:sp>
-      <p:sp>
-        <p:nvSpPr>
-          <p:cNvPr id="283" name="Google Shape;283;p17"/>
-          <p:cNvSpPr/>
-          <p:nvPr/>
-        </p:nvSpPr>
-        <p:spPr>
-          <a:xfrm flipH="1" rot="-5400000">
-            <a:off x="-1180882" y="1638085"/>
-            <a:ext cx="6857572" cy="3581401"/>
-          </a:xfrm>
-          <a:prstGeom prst="rect">
-            <a:avLst/>
-          </a:prstGeom>
-          <a:gradFill>
-            <a:gsLst>
-              <a:gs pos="0">
-                <a:srgbClr val="000000">
-                  <a:alpha val="58039"/>
-                </a:srgbClr>
-              </a:gs>
-              <a:gs pos="69000">
-                <a:srgbClr val="156082">
-                  <a:alpha val="0"/>
-                </a:srgbClr>
-              </a:gs>
-              <a:gs pos="100000">
-                <a:srgbClr val="156082">
-                  <a:alpha val="0"/>
-                </a:srgbClr>
-              </a:gs>
-            </a:gsLst>
-            <a:lin ang="13200000" scaled="0"/>
-          </a:gradFill>
-          <a:ln>
-            <a:noFill/>
-          </a:ln>
-        </p:spPr>
-        <p:txBody>
-          <a:bodyPr anchorCtr="0" anchor="ctr" bIns="45700" lIns="91425" spcFirstLastPara="1" rIns="91425" wrap="square" tIns="45700">
-            <a:noAutofit/>
-          </a:bodyPr>
-          <a:lstStyle/>
-          <a:p>
-            <a:pPr indent="0" lvl="0" marL="0" marR="0" rtl="0" algn="ctr">
-              <a:lnSpc>
-                <a:spcPct val="100000"/>
-              </a:lnSpc>
-              <a:spcBef>
-                <a:spcPts val="0"/>
-              </a:spcBef>
-              <a:spcAft>
-                <a:spcPts val="0"/>
-              </a:spcAft>
-              <a:buClr>
-                <a:srgbClr val="000000"/>
-              </a:buClr>
-              <a:buSzPts val="1800"/>
-              <a:buFont typeface="Arial"/>
-              <a:buNone/>
-            </a:pPr>
-            <a:r>
-              <a:t/>
-            </a:r>
-            <a:endParaRPr b="0" i="0" sz="1800" u="none" cap="none" strike="noStrike">
-              <a:solidFill>
-                <a:schemeClr val="lt1"/>
-              </a:solidFill>
-              <a:latin typeface="Arial"/>
-              <a:ea typeface="Arial"/>
-              <a:cs typeface="Arial"/>
-              <a:sym typeface="Arial"/>
-            </a:endParaRPr>
-          </a:p>
-        </p:txBody>
-      </p:sp>
-      <p:sp>
-        <p:nvSpPr>
-          <p:cNvPr id="284" name="Google Shape;284;p17"/>
-          <p:cNvSpPr/>
-          <p:nvPr/>
-        </p:nvSpPr>
-        <p:spPr>
-          <a:xfrm rot="6097846">
-            <a:off x="-747355" y="1201312"/>
-            <a:ext cx="4808302" cy="4088666"/>
-          </a:xfrm>
-          <a:custGeom>
-            <a:rect b="b" l="l" r="r" t="t"/>
-            <a:pathLst>
-              <a:path extrusionOk="0" h="4088666" w="4808302">
-                <a:moveTo>
-                  <a:pt x="48844" y="2888671"/>
-                </a:moveTo>
-                <a:cubicBezTo>
-                  <a:pt x="16818" y="2732167"/>
-                  <a:pt x="0" y="2570123"/>
-                  <a:pt x="0" y="2404151"/>
-                </a:cubicBezTo>
-                <a:cubicBezTo>
-                  <a:pt x="0" y="1076375"/>
-                  <a:pt x="1076375" y="0"/>
-                  <a:pt x="2404151" y="0"/>
-                </a:cubicBezTo>
-                <a:cubicBezTo>
-                  <a:pt x="3731927" y="0"/>
-                  <a:pt x="4808302" y="1076375"/>
-                  <a:pt x="4808302" y="2404151"/>
-                </a:cubicBezTo>
-                <a:cubicBezTo>
-                  <a:pt x="4808302" y="2653109"/>
-                  <a:pt x="4770461" y="2893229"/>
-                  <a:pt x="4700216" y="3119072"/>
-                </a:cubicBezTo>
-                <a:lnTo>
-                  <a:pt x="4643143" y="3275009"/>
-                </a:lnTo>
-                <a:lnTo>
-                  <a:pt x="690093" y="4088666"/>
-                </a:lnTo>
-                <a:lnTo>
-                  <a:pt x="548991" y="3933414"/>
-                </a:lnTo>
-                <a:cubicBezTo>
-                  <a:pt x="304015" y="3636572"/>
-                  <a:pt x="128908" y="3279932"/>
-                  <a:pt x="48844" y="2888671"/>
-                </a:cubicBezTo>
-                <a:close/>
-              </a:path>
-            </a:pathLst>
-          </a:custGeom>
-          <a:gradFill>
-            <a:gsLst>
-              <a:gs pos="0">
-                <a:srgbClr val="43AFE2">
-                  <a:alpha val="0"/>
-                </a:srgbClr>
-              </a:gs>
-              <a:gs pos="39000">
-                <a:srgbClr val="43AFE2">
-                  <a:alpha val="0"/>
-                </a:srgbClr>
-              </a:gs>
-              <a:gs pos="100000">
-                <a:srgbClr val="0F4861">
-                  <a:alpha val="25098"/>
-                </a:srgbClr>
-              </a:gs>
-            </a:gsLst>
-            <a:lin ang="18600000" scaled="0"/>
-          </a:gradFill>
-          <a:ln>
-            <a:noFill/>
-          </a:ln>
-        </p:spPr>
-        <p:txBody>
-          <a:bodyPr anchorCtr="0" anchor="ctr" bIns="45700" lIns="91425" spcFirstLastPara="1" rIns="91425" wrap="square" tIns="45700">
-            <a:noAutofit/>
-          </a:bodyPr>
-          <a:lstStyle/>
-          <a:p>
-            <a:pPr indent="0" lvl="0" marL="0" marR="0" rtl="0" algn="ctr">
-              <a:lnSpc>
-                <a:spcPct val="100000"/>
-              </a:lnSpc>
-              <a:spcBef>
-                <a:spcPts val="0"/>
-              </a:spcBef>
-              <a:spcAft>
-                <a:spcPts val="0"/>
-              </a:spcAft>
-              <a:buClr>
-                <a:srgbClr val="000000"/>
-              </a:buClr>
-              <a:buSzPts val="1800"/>
-              <a:buFont typeface="Arial"/>
-              <a:buNone/>
-            </a:pPr>
-            <a:r>
-              <a:t/>
-            </a:r>
-            <a:endParaRPr b="0" i="0" sz="1800" u="none" cap="none" strike="noStrike">
-              <a:solidFill>
-                <a:schemeClr val="lt1"/>
-              </a:solidFill>
-              <a:latin typeface="Arial"/>
-              <a:ea typeface="Arial"/>
-              <a:cs typeface="Arial"/>
-              <a:sym typeface="Arial"/>
-            </a:endParaRPr>
-          </a:p>
-        </p:txBody>
-      </p:sp>
-      <p:sp>
-        <p:nvSpPr>
-          <p:cNvPr id="285" name="Google Shape;285;p17"/>
+          <p:cNvPr id="282" name="Google Shape;282;g3515db5e1ac_7_5"/>
           <p:cNvSpPr txBox="1"/>
           <p:nvPr>
             <p:ph type="title"/>
@@ -29545,8 +29797,8 @@
         </p:nvSpPr>
         <p:spPr>
           <a:xfrm>
-            <a:off x="126650" y="2614700"/>
-            <a:ext cx="3380700" cy="3072000"/>
+            <a:off x="838200" y="2766150"/>
+            <a:ext cx="10515600" cy="1325700"/>
           </a:xfrm>
           <a:prstGeom prst="rect">
             <a:avLst/>
@@ -29557,12 +29809,12 @@
           </a:ln>
         </p:spPr>
         <p:txBody>
-          <a:bodyPr anchorCtr="0" anchor="t" bIns="45700" lIns="91425" spcFirstLastPara="1" rIns="91425" wrap="square" tIns="45700">
+          <a:bodyPr anchorCtr="0" anchor="ctr" bIns="45700" lIns="91425" spcFirstLastPara="1" rIns="91425" wrap="square" tIns="45700">
             <a:normAutofit/>
           </a:bodyPr>
           <a:lstStyle/>
           <a:p>
-            <a:pPr indent="0" lvl="0" marL="0" rtl="0" algn="l">
+            <a:pPr indent="0" lvl="0" marL="0" rtl="0" algn="ctr">
               <a:lnSpc>
                 <a:spcPct val="90000"/>
               </a:lnSpc>
@@ -29575,96 +29827,26 @@
               <a:buClr>
                 <a:srgbClr val="FFFFFF"/>
               </a:buClr>
-              <a:buSzPts val="4000"/>
+              <a:buSzPts val="4400"/>
               <a:buFont typeface="Play"/>
               <a:buNone/>
             </a:pPr>
             <a:r>
-              <a:rPr b="1" lang="es-MX" sz="4000">
+              <a:rPr b="1" lang="es-MX" sz="8800">
                 <a:solidFill>
                   <a:srgbClr val="FFFFFF"/>
                 </a:solidFill>
               </a:rPr>
-              <a:t>Diagrama de UML:</a:t>
+              <a:t>Conclusión</a:t>
             </a:r>
-            <a:br>
-              <a:rPr b="1" lang="es-MX" sz="4000">
-                <a:solidFill>
-                  <a:srgbClr val="FFFFFF"/>
-                </a:solidFill>
-              </a:rPr>
-            </a:br>
-            <a:r>
-              <a:rPr b="1" i="1" lang="es-MX" sz="3200">
-                <a:solidFill>
-                  <a:srgbClr val="FFFFFF"/>
-                </a:solidFill>
-              </a:rPr>
-              <a:t>Actor </a:t>
-            </a:r>
-            <a:endParaRPr b="1" i="1" sz="3200">
+            <a:endParaRPr b="1" sz="8800">
               <a:solidFill>
                 <a:srgbClr val="FFFFFF"/>
               </a:solidFill>
             </a:endParaRPr>
           </a:p>
-          <a:p>
-            <a:pPr indent="0" lvl="0" marL="0" rtl="0" algn="l">
-              <a:lnSpc>
-                <a:spcPct val="90000"/>
-              </a:lnSpc>
-              <a:spcBef>
-                <a:spcPts val="0"/>
-              </a:spcBef>
-              <a:spcAft>
-                <a:spcPts val="0"/>
-              </a:spcAft>
-              <a:buClr>
-                <a:srgbClr val="FFFFFF"/>
-              </a:buClr>
-              <a:buSzPts val="4000"/>
-              <a:buFont typeface="Play"/>
-              <a:buNone/>
-            </a:pPr>
-            <a:r>
-              <a:rPr b="1" i="1" lang="es-MX" sz="3200">
-                <a:solidFill>
-                  <a:srgbClr val="FFFFFF"/>
-                </a:solidFill>
-              </a:rPr>
-              <a:t>Sistema</a:t>
-            </a:r>
-            <a:endParaRPr b="1" i="1" sz="3600"/>
-          </a:p>
         </p:txBody>
       </p:sp>
-      <p:pic>
-        <p:nvPicPr>
-          <p:cNvPr id="286" name="Google Shape;286;p17"/>
-          <p:cNvPicPr preferRelativeResize="0"/>
-          <p:nvPr/>
-        </p:nvPicPr>
-        <p:blipFill rotWithShape="1">
-          <a:blip r:embed="rId3">
-            <a:alphaModFix/>
-          </a:blip>
-          <a:srcRect b="0" l="0" r="0" t="0"/>
-          <a:stretch/>
-        </p:blipFill>
-        <p:spPr>
-          <a:xfrm>
-            <a:off x="4143850" y="1114088"/>
-            <a:ext cx="7895150" cy="4263125"/>
-          </a:xfrm>
-          <a:prstGeom prst="rect">
-            <a:avLst/>
-          </a:prstGeom>
-          <a:noFill/>
-          <a:ln>
-            <a:noFill/>
-          </a:ln>
-        </p:spPr>
-      </p:pic>
     </p:spTree>
   </p:cSld>
   <p:clrMapOvr>
@@ -30472,184 +30654,6 @@
               <a:ea typeface="Arial"/>
               <a:cs typeface="Arial"/>
               <a:sym typeface="Arial"/>
-            </a:endParaRPr>
-          </a:p>
-        </p:txBody>
-      </p:sp>
-    </p:spTree>
-  </p:cSld>
-  <p:clrMapOvr>
-    <a:masterClrMapping/>
-  </p:clrMapOvr>
-</p:sld>
-</file>
-
-<file path=ppt/slides/slide20.xml><?xml version="1.0" encoding="utf-8"?>
-<p:sld xmlns:a="http://schemas.openxmlformats.org/drawingml/2006/main" xmlns:r="http://schemas.openxmlformats.org/officeDocument/2006/relationships" xmlns:mc="http://schemas.openxmlformats.org/markup-compatibility/2006" xmlns:mv="urn:schemas-microsoft-com:mac:vml" xmlns:p="http://schemas.openxmlformats.org/presentationml/2006/main" xmlns:c="http://schemas.openxmlformats.org/drawingml/2006/chart" xmlns:dgm="http://schemas.openxmlformats.org/drawingml/2006/diagram" xmlns:o="urn:schemas-microsoft-com:office:office" xmlns:v="urn:schemas-microsoft-com:vml" xmlns:pvml="urn:schemas-microsoft-com:office:powerpoint" xmlns:com="http://schemas.openxmlformats.org/drawingml/2006/compatibility" xmlns:p14="http://schemas.microsoft.com/office/powerpoint/2010/main" xmlns:p15="http://schemas.microsoft.com/office/powerpoint/2012/main" xmlns:ahyp="http://schemas.microsoft.com/office/drawing/2018/hyperlinkcolor">
-  <p:cSld>
-    <p:bg>
-      <p:bgPr>
-        <a:solidFill>
-          <a:schemeClr val="dk1"/>
-        </a:solidFill>
-      </p:bgPr>
-    </p:bg>
-    <p:spTree>
-      <p:nvGrpSpPr>
-        <p:cNvPr id="290" name="Shape 290"/>
-        <p:cNvGrpSpPr/>
-        <p:nvPr/>
-      </p:nvGrpSpPr>
-      <p:grpSpPr>
-        <a:xfrm>
-          <a:off x="0" y="0"/>
-          <a:ext cx="0" cy="0"/>
-          <a:chOff x="0" y="0"/>
-          <a:chExt cx="0" cy="0"/>
-        </a:xfrm>
-      </p:grpSpPr>
-      <p:sp>
-        <p:nvSpPr>
-          <p:cNvPr id="291" name="Google Shape;291;g3515db5e1ac_7_5"/>
-          <p:cNvSpPr/>
-          <p:nvPr/>
-        </p:nvSpPr>
-        <p:spPr>
-          <a:xfrm>
-            <a:off x="0" y="0"/>
-            <a:ext cx="12192000" cy="6858000"/>
-          </a:xfrm>
-          <a:prstGeom prst="rect">
-            <a:avLst/>
-          </a:prstGeom>
-          <a:solidFill>
-            <a:srgbClr val="000000"/>
-          </a:solidFill>
-          <a:ln>
-            <a:noFill/>
-          </a:ln>
-        </p:spPr>
-        <p:txBody>
-          <a:bodyPr anchorCtr="0" anchor="ctr" bIns="45700" lIns="91425" spcFirstLastPara="1" rIns="91425" wrap="square" tIns="45700">
-            <a:noAutofit/>
-          </a:bodyPr>
-          <a:lstStyle/>
-          <a:p>
-            <a:pPr indent="0" lvl="0" marL="0" marR="0" rtl="0" algn="ctr">
-              <a:lnSpc>
-                <a:spcPct val="100000"/>
-              </a:lnSpc>
-              <a:spcBef>
-                <a:spcPts val="0"/>
-              </a:spcBef>
-              <a:spcAft>
-                <a:spcPts val="0"/>
-              </a:spcAft>
-              <a:buClr>
-                <a:srgbClr val="000000"/>
-              </a:buClr>
-              <a:buSzPts val="1800"/>
-              <a:buFont typeface="Arial"/>
-              <a:buNone/>
-            </a:pPr>
-            <a:r>
-              <a:t/>
-            </a:r>
-            <a:endParaRPr b="0" i="0" sz="1800" u="none" cap="none" strike="noStrike">
-              <a:solidFill>
-                <a:schemeClr val="lt1"/>
-              </a:solidFill>
-              <a:latin typeface="Arial"/>
-              <a:ea typeface="Arial"/>
-              <a:cs typeface="Arial"/>
-              <a:sym typeface="Arial"/>
-            </a:endParaRPr>
-          </a:p>
-        </p:txBody>
-      </p:sp>
-      <p:pic>
-        <p:nvPicPr>
-          <p:cNvPr descr="Lupa resalta un rendimiento económico decreciente" id="292" name="Google Shape;292;g3515db5e1ac_7_5"/>
-          <p:cNvPicPr preferRelativeResize="0"/>
-          <p:nvPr/>
-        </p:nvPicPr>
-        <p:blipFill rotWithShape="1">
-          <a:blip r:embed="rId3">
-            <a:alphaModFix amt="35000"/>
-          </a:blip>
-          <a:srcRect b="6715" l="0" r="0" t="9016"/>
-          <a:stretch/>
-        </p:blipFill>
-        <p:spPr>
-          <a:xfrm>
-            <a:off x="7" y="10"/>
-            <a:ext cx="12191980" cy="6857989"/>
-          </a:xfrm>
-          <a:prstGeom prst="rect">
-            <a:avLst/>
-          </a:prstGeom>
-          <a:noFill/>
-          <a:ln>
-            <a:noFill/>
-          </a:ln>
-        </p:spPr>
-      </p:pic>
-      <p:sp>
-        <p:nvSpPr>
-          <p:cNvPr id="293" name="Google Shape;293;g3515db5e1ac_7_5"/>
-          <p:cNvSpPr txBox="1"/>
-          <p:nvPr>
-            <p:ph type="title"/>
-          </p:nvPr>
-        </p:nvSpPr>
-        <p:spPr>
-          <a:xfrm>
-            <a:off x="838200" y="2766150"/>
-            <a:ext cx="10515600" cy="1325700"/>
-          </a:xfrm>
-          <a:prstGeom prst="rect">
-            <a:avLst/>
-          </a:prstGeom>
-          <a:noFill/>
-          <a:ln>
-            <a:noFill/>
-          </a:ln>
-        </p:spPr>
-        <p:txBody>
-          <a:bodyPr anchorCtr="0" anchor="ctr" bIns="45700" lIns="91425" spcFirstLastPara="1" rIns="91425" wrap="square" tIns="45700">
-            <a:normAutofit/>
-          </a:bodyPr>
-          <a:lstStyle/>
-          <a:p>
-            <a:pPr indent="0" lvl="0" marL="0" rtl="0" algn="ctr">
-              <a:lnSpc>
-                <a:spcPct val="90000"/>
-              </a:lnSpc>
-              <a:spcBef>
-                <a:spcPts val="0"/>
-              </a:spcBef>
-              <a:spcAft>
-                <a:spcPts val="0"/>
-              </a:spcAft>
-              <a:buClr>
-                <a:srgbClr val="FFFFFF"/>
-              </a:buClr>
-              <a:buSzPts val="4400"/>
-              <a:buFont typeface="Play"/>
-              <a:buNone/>
-            </a:pPr>
-            <a:r>
-              <a:rPr b="1" lang="es-MX" sz="8800">
-                <a:solidFill>
-                  <a:srgbClr val="FFFFFF"/>
-                </a:solidFill>
-              </a:rPr>
-              <a:t>Conclusión</a:t>
-            </a:r>
-            <a:endParaRPr b="1" sz="8800">
-              <a:solidFill>
-                <a:srgbClr val="FFFFFF"/>
-              </a:solidFill>
             </a:endParaRPr>
           </a:p>
         </p:txBody>
@@ -31789,7 +31793,7 @@
             <a:gsLst>
               <a:gs pos="0">
                 <a:srgbClr val="156082">
-                  <a:alpha val="49019"/>
+                  <a:alpha val="48627"/>
                 </a:srgbClr>
               </a:gs>
               <a:gs pos="100000">
@@ -31860,7 +31864,7 @@
             <a:gsLst>
               <a:gs pos="0">
                 <a:srgbClr val="000000">
-                  <a:alpha val="58039"/>
+                  <a:alpha val="57647"/>
                 </a:srgbClr>
               </a:gs>
               <a:gs pos="69000">
@@ -31988,7 +31992,7 @@
               </a:gs>
               <a:gs pos="100000">
                 <a:srgbClr val="0F4861">
-                  <a:alpha val="25098"/>
+                  <a:alpha val="24705"/>
                 </a:srgbClr>
               </a:gs>
             </a:gsLst>
@@ -32295,7 +32299,7 @@
             <a:gsLst>
               <a:gs pos="0">
                 <a:srgbClr val="156082">
-                  <a:alpha val="49019"/>
+                  <a:alpha val="48627"/>
                 </a:srgbClr>
               </a:gs>
               <a:gs pos="100000">
@@ -32366,7 +32370,7 @@
             <a:gsLst>
               <a:gs pos="0">
                 <a:srgbClr val="000000">
-                  <a:alpha val="58039"/>
+                  <a:alpha val="57647"/>
                 </a:srgbClr>
               </a:gs>
               <a:gs pos="69000">
@@ -32494,7 +32498,7 @@
               </a:gs>
               <a:gs pos="100000">
                 <a:srgbClr val="0F4861">
-                  <a:alpha val="25098"/>
+                  <a:alpha val="24705"/>
                 </a:srgbClr>
               </a:gs>
             </a:gsLst>
@@ -32801,7 +32805,7 @@
             <a:gsLst>
               <a:gs pos="0">
                 <a:srgbClr val="156082">
-                  <a:alpha val="49019"/>
+                  <a:alpha val="48627"/>
                 </a:srgbClr>
               </a:gs>
               <a:gs pos="100000">
@@ -32872,7 +32876,7 @@
             <a:gsLst>
               <a:gs pos="0">
                 <a:srgbClr val="000000">
-                  <a:alpha val="58039"/>
+                  <a:alpha val="57647"/>
                 </a:srgbClr>
               </a:gs>
               <a:gs pos="69000">
@@ -33000,7 +33004,7 @@
               </a:gs>
               <a:gs pos="100000">
                 <a:srgbClr val="0F4861">
-                  <a:alpha val="25098"/>
+                  <a:alpha val="24705"/>
                 </a:srgbClr>
               </a:gs>
             </a:gsLst>
@@ -33240,7 +33244,7 @@
             <a:gsLst>
               <a:gs pos="0">
                 <a:srgbClr val="000000">
-                  <a:alpha val="94901"/>
+                  <a:alpha val="94509"/>
                 </a:srgbClr>
               </a:gs>
               <a:gs pos="100000">
@@ -33309,17 +33313,17 @@
             <a:gsLst>
               <a:gs pos="0">
                 <a:srgbClr val="0A3041">
-                  <a:alpha val="67058"/>
+                  <a:alpha val="66666"/>
                 </a:srgbClr>
               </a:gs>
               <a:gs pos="19000">
                 <a:srgbClr val="0A3041">
-                  <a:alpha val="67058"/>
+                  <a:alpha val="66666"/>
                 </a:srgbClr>
               </a:gs>
               <a:gs pos="100000">
                 <a:srgbClr val="156082">
-                  <a:alpha val="78039"/>
+                  <a:alpha val="77647"/>
                 </a:srgbClr>
               </a:gs>
             </a:gsLst>
@@ -33395,12 +33399,12 @@
               </a:gs>
               <a:gs pos="99000">
                 <a:srgbClr val="000000">
-                  <a:alpha val="72941"/>
+                  <a:alpha val="72549"/>
                 </a:srgbClr>
               </a:gs>
               <a:gs pos="100000">
                 <a:srgbClr val="000000">
-                  <a:alpha val="72941"/>
+                  <a:alpha val="72549"/>
                 </a:srgbClr>
               </a:gs>
             </a:gsLst>
@@ -33523,7 +33527,7 @@
             <a:tbl>
               <a:tblPr>
                 <a:noFill/>
-                <a:tableStyleId>{02695137-A76C-4F8E-8C47-4E3D05D5F174}</a:tableStyleId>
+                <a:tableStyleId>{3CEAAF12-135D-4CBE-B95B-C1DC52DF7AB2}</a:tableStyleId>
               </a:tblPr>
               <a:tblGrid>
                 <a:gridCol w="2041825"/>
@@ -35249,7 +35253,7 @@
             <a:gsLst>
               <a:gs pos="0">
                 <a:srgbClr val="156082">
-                  <a:alpha val="49019"/>
+                  <a:alpha val="48627"/>
                 </a:srgbClr>
               </a:gs>
               <a:gs pos="100000">
@@ -35320,7 +35324,7 @@
             <a:gsLst>
               <a:gs pos="0">
                 <a:srgbClr val="000000">
-                  <a:alpha val="58039"/>
+                  <a:alpha val="57647"/>
                 </a:srgbClr>
               </a:gs>
               <a:gs pos="69000">
@@ -35448,7 +35452,7 @@
               </a:gs>
               <a:gs pos="100000">
                 <a:srgbClr val="0F4861">
-                  <a:alpha val="25098"/>
+                  <a:alpha val="24705"/>
                 </a:srgbClr>
               </a:gs>
             </a:gsLst>
@@ -35590,9 +35594,9 @@
 </file>
 
 <file path=ppt/theme/theme1.xml><?xml version="1.0" encoding="utf-8"?>
-<a:theme xmlns:a="http://schemas.openxmlformats.org/drawingml/2006/main" xmlns:r="http://schemas.openxmlformats.org/officeDocument/2006/relationships">
+<a:theme xmlns:a="http://schemas.openxmlformats.org/drawingml/2006/main" xmlns:r="http://schemas.openxmlformats.org/officeDocument/2006/relationships" name="Tema de Office">
   <a:themeElements>
-    <a:clrScheme name="Default">
+    <a:clrScheme name="Office">
       <a:dk1>
         <a:srgbClr val="000000"/>
       </a:dk1>
@@ -35600,34 +35604,34 @@
         <a:srgbClr val="FFFFFF"/>
       </a:lt1>
       <a:dk2>
-        <a:srgbClr val="158158"/>
+        <a:srgbClr val="0E2841"/>
       </a:dk2>
       <a:lt2>
-        <a:srgbClr val="F3F3F3"/>
+        <a:srgbClr val="E8E8E8"/>
       </a:lt2>
       <a:accent1>
-        <a:srgbClr val="058DC7"/>
+        <a:srgbClr val="156082"/>
       </a:accent1>
       <a:accent2>
-        <a:srgbClr val="50B432"/>
+        <a:srgbClr val="E97132"/>
       </a:accent2>
       <a:accent3>
-        <a:srgbClr val="ED561B"/>
+        <a:srgbClr val="196B24"/>
       </a:accent3>
       <a:accent4>
-        <a:srgbClr val="EDEF00"/>
+        <a:srgbClr val="0F9ED5"/>
       </a:accent4>
       <a:accent5>
-        <a:srgbClr val="24CBE5"/>
+        <a:srgbClr val="A02B93"/>
       </a:accent5>
       <a:accent6>
-        <a:srgbClr val="64E572"/>
+        <a:srgbClr val="4EA72E"/>
       </a:accent6>
       <a:hlink>
-        <a:srgbClr val="2200CC"/>
+        <a:srgbClr val="467886"/>
       </a:hlink>
       <a:folHlink>
-        <a:srgbClr val="551A8B"/>
+        <a:srgbClr val="96607D"/>
       </a:folHlink>
     </a:clrScheme>
     <a:fontScheme name="Office">
@@ -36148,9 +36152,9 @@
 </file>
 
 <file path=ppt/theme/theme3.xml><?xml version="1.0" encoding="utf-8"?>
-<a:theme xmlns:a="http://schemas.openxmlformats.org/drawingml/2006/main" xmlns:r="http://schemas.openxmlformats.org/officeDocument/2006/relationships" name="Tema de Office">
+<a:theme xmlns:a="http://schemas.openxmlformats.org/drawingml/2006/main" xmlns:r="http://schemas.openxmlformats.org/officeDocument/2006/relationships">
   <a:themeElements>
-    <a:clrScheme name="Office">
+    <a:clrScheme name="Default">
       <a:dk1>
         <a:srgbClr val="000000"/>
       </a:dk1>
@@ -36158,34 +36162,34 @@
         <a:srgbClr val="FFFFFF"/>
       </a:lt1>
       <a:dk2>
-        <a:srgbClr val="0E2841"/>
+        <a:srgbClr val="158158"/>
       </a:dk2>
       <a:lt2>
-        <a:srgbClr val="E8E8E8"/>
+        <a:srgbClr val="F3F3F3"/>
       </a:lt2>
       <a:accent1>
-        <a:srgbClr val="156082"/>
+        <a:srgbClr val="058DC7"/>
       </a:accent1>
       <a:accent2>
-        <a:srgbClr val="E97132"/>
+        <a:srgbClr val="50B432"/>
       </a:accent2>
       <a:accent3>
-        <a:srgbClr val="196B24"/>
+        <a:srgbClr val="ED561B"/>
       </a:accent3>
       <a:accent4>
-        <a:srgbClr val="0F9ED5"/>
+        <a:srgbClr val="EDEF00"/>
       </a:accent4>
       <a:accent5>
-        <a:srgbClr val="A02B93"/>
+        <a:srgbClr val="24CBE5"/>
       </a:accent5>
       <a:accent6>
-        <a:srgbClr val="4EA72E"/>
+        <a:srgbClr val="64E572"/>
       </a:accent6>
       <a:hlink>
-        <a:srgbClr val="467886"/>
+        <a:srgbClr val="2200CC"/>
       </a:hlink>
       <a:folHlink>
-        <a:srgbClr val="96607D"/>
+        <a:srgbClr val="551A8B"/>
       </a:folHlink>
     </a:clrScheme>
     <a:fontScheme name="Office">
